--- a/files/prezentacia_1.pptx
+++ b/files/prezentacia_1.pptx
@@ -11,10 +11,9 @@
     <p:sldId id="265" r:id="rId8"/>
     <p:sldId id="266" r:id="rId9"/>
     <p:sldId id="259" r:id="rId10"/>
-    <p:sldId id="260" r:id="rId11"/>
-    <p:sldId id="263" r:id="rId12"/>
-    <p:sldId id="264" r:id="rId13"/>
-    <p:sldId id="262" r:id="rId14"/>
+    <p:sldId id="263" r:id="rId11"/>
+    <p:sldId id="264" r:id="rId12"/>
+    <p:sldId id="262" r:id="rId13"/>
   </p:sldIdLst>
   <p:sldSz cx="12192000" cy="6858000"/>
   <p:notesSz cx="6858000" cy="9144000"/>
@@ -113,6 +112,11 @@
       </a:defRPr>
     </a:lvl9pPr>
   </p:defaultTextStyle>
+  <p:extLst>
+    <p:ext uri="{EFAFB233-063F-42B5-8137-9DF3F51BA10A}">
+      <p15:sldGuideLst xmlns:p15="http://schemas.microsoft.com/office/powerpoint/2012/main"/>
+    </p:ext>
+  </p:extLst>
 </p:presentation>
 </file>
 
@@ -272,7 +276,7 @@
           <a:p>
             <a:fld id="{6444479B-705B-4489-957E-7E8A228BDFA0}" type="datetime1">
               <a:rPr lang="en-US" smtClean="0"/>
-              <a:t>3/2/2026</a:t>
+              <a:t>3/3/2026</a:t>
             </a:fld>
             <a:endParaRPr lang="en-US" dirty="0"/>
           </a:p>
@@ -472,7 +476,7 @@
           <a:p>
             <a:fld id="{C07B66AD-7C08-490A-ADA4-B47E10FB2407}" type="datetime1">
               <a:rPr lang="en-US" smtClean="0"/>
-              <a:t>3/2/2026</a:t>
+              <a:t>3/3/2026</a:t>
             </a:fld>
             <a:endParaRPr lang="en-US" dirty="0"/>
           </a:p>
@@ -731,7 +735,7 @@
           <a:p>
             <a:fld id="{05B95027-4255-49E7-9841-CD21BCC99996}" type="datetime1">
               <a:rPr lang="en-US" smtClean="0"/>
-              <a:t>3/2/2026</a:t>
+              <a:t>3/3/2026</a:t>
             </a:fld>
             <a:endParaRPr lang="en-US" dirty="0"/>
           </a:p>
@@ -972,7 +976,7 @@
           <a:p>
             <a:fld id="{9F89F774-3FA6-43B8-9241-99959C8FD463}" type="datetime1">
               <a:rPr lang="en-US" smtClean="0"/>
-              <a:t>3/2/2026</a:t>
+              <a:t>3/3/2026</a:t>
             </a:fld>
             <a:endParaRPr lang="en-US" dirty="0"/>
           </a:p>
@@ -1299,7 +1303,7 @@
           <a:p>
             <a:fld id="{F9504452-5DCC-4FE2-A5C9-8A5EF6714D65}" type="datetime1">
               <a:rPr lang="en-US" smtClean="0"/>
-              <a:t>3/2/2026</a:t>
+              <a:t>3/3/2026</a:t>
             </a:fld>
             <a:endParaRPr lang="en-US" dirty="0"/>
           </a:p>
@@ -1609,7 +1613,7 @@
           <a:p>
             <a:fld id="{E579ABC2-0180-4F3A-A895-A85BC724D472}" type="datetime1">
               <a:rPr lang="en-US" smtClean="0"/>
-              <a:t>3/2/2026</a:t>
+              <a:t>3/3/2026</a:t>
             </a:fld>
             <a:endParaRPr lang="en-US" dirty="0"/>
           </a:p>
@@ -2027,7 +2031,7 @@
           <a:p>
             <a:fld id="{6AEEA9BA-4E8F-439E-BEA4-91FBA01E3F5F}" type="datetime1">
               <a:rPr lang="en-US" smtClean="0"/>
-              <a:t>3/2/2026</a:t>
+              <a:t>3/3/2026</a:t>
             </a:fld>
             <a:endParaRPr lang="en-US" dirty="0"/>
           </a:p>
@@ -2169,7 +2173,7 @@
           <a:p>
             <a:fld id="{BE15BF18-0007-481C-AA29-413124BC3EE7}" type="datetime1">
               <a:rPr lang="en-US" smtClean="0"/>
-              <a:t>3/2/2026</a:t>
+              <a:t>3/3/2026</a:t>
             </a:fld>
             <a:endParaRPr lang="en-US" dirty="0"/>
           </a:p>
@@ -2331,7 +2335,7 @@
           <a:p>
             <a:fld id="{09BE9870-3748-43AD-B547-02A075CB4A1D}" type="datetime1">
               <a:rPr lang="en-US" smtClean="0"/>
-              <a:t>3/2/2026</a:t>
+              <a:t>3/3/2026</a:t>
             </a:fld>
             <a:endParaRPr lang="en-US" dirty="0"/>
           </a:p>
@@ -2648,7 +2652,7 @@
           <a:p>
             <a:fld id="{558E7897-33C5-4F1A-9307-D068E37F3DC7}" type="datetime1">
               <a:rPr lang="en-US" smtClean="0"/>
-              <a:t>3/2/2026</a:t>
+              <a:t>3/3/2026</a:t>
             </a:fld>
             <a:endParaRPr lang="en-US" dirty="0"/>
           </a:p>
@@ -2942,7 +2946,7 @@
           <a:p>
             <a:fld id="{82E171BA-CC09-47C8-A6DF-F5C5CB59CEEC}" type="datetime1">
               <a:rPr lang="en-US" smtClean="0"/>
-              <a:t>3/2/2026</a:t>
+              <a:t>3/3/2026</a:t>
             </a:fld>
             <a:endParaRPr lang="en-US" dirty="0"/>
           </a:p>
@@ -3183,7 +3187,7 @@
           <a:p>
             <a:fld id="{7DA38F49-B3E2-4BF0-BEC7-C30D34ABBB8D}" type="datetime1">
               <a:rPr lang="en-US" smtClean="0"/>
-              <a:t>3/2/2026</a:t>
+              <a:t>3/3/2026</a:t>
             </a:fld>
             <a:endParaRPr lang="en-US" dirty="0"/>
           </a:p>
@@ -4184,7 +4188,1322 @@
 </p:sld>
 </file>
 
-<file path=ppt/slides/slide10.xml><?xml version="1.0" encoding="utf-8"?>
+<file path=ppt/slides/slide2.xml><?xml version="1.0" encoding="utf-8"?>
+<p:sld xmlns:a="http://schemas.openxmlformats.org/drawingml/2006/main" xmlns:r="http://schemas.openxmlformats.org/officeDocument/2006/relationships" xmlns:p="http://schemas.openxmlformats.org/presentationml/2006/main">
+  <p:cSld>
+    <p:bg>
+      <p:bgPr>
+        <a:blipFill dpi="0" rotWithShape="1">
+          <a:blip r:embed="rId2">
+            <a:lum/>
+          </a:blip>
+          <a:srcRect/>
+          <a:stretch>
+            <a:fillRect/>
+          </a:stretch>
+        </a:blipFill>
+        <a:effectLst/>
+      </p:bgPr>
+    </p:bg>
+    <p:spTree>
+      <p:nvGrpSpPr>
+        <p:cNvPr id="1" name="">
+          <a:extLst>
+            <a:ext uri="{FF2B5EF4-FFF2-40B4-BE49-F238E27FC236}">
+              <a16:creationId xmlns:a16="http://schemas.microsoft.com/office/drawing/2014/main" id="{FF12DF51-31F7-EE61-9E07-14E8DA39FF69}"/>
+            </a:ext>
+          </a:extLst>
+        </p:cNvPr>
+        <p:cNvGrpSpPr/>
+        <p:nvPr/>
+      </p:nvGrpSpPr>
+      <p:grpSpPr>
+        <a:xfrm>
+          <a:off x="0" y="0"/>
+          <a:ext cx="0" cy="0"/>
+          <a:chOff x="0" y="0"/>
+          <a:chExt cx="0" cy="0"/>
+        </a:xfrm>
+      </p:grpSpPr>
+      <p:sp>
+        <p:nvSpPr>
+          <p:cNvPr id="2" name="Nadpis 1">
+            <a:extLst>
+              <a:ext uri="{FF2B5EF4-FFF2-40B4-BE49-F238E27FC236}">
+                <a16:creationId xmlns:a16="http://schemas.microsoft.com/office/drawing/2014/main" id="{097AE61D-E1B8-8517-B747-99902A89884A}"/>
+              </a:ext>
+            </a:extLst>
+          </p:cNvPr>
+          <p:cNvSpPr>
+            <a:spLocks noGrp="1"/>
+          </p:cNvSpPr>
+          <p:nvPr>
+            <p:ph type="title"/>
+          </p:nvPr>
+        </p:nvSpPr>
+        <p:spPr>
+          <a:xfrm>
+            <a:off x="640079" y="1435895"/>
+            <a:ext cx="10890929" cy="1097280"/>
+          </a:xfrm>
+        </p:spPr>
+        <p:txBody>
+          <a:bodyPr>
+            <a:normAutofit/>
+          </a:bodyPr>
+          <a:lstStyle/>
+          <a:p>
+            <a:r>
+              <a:rPr lang="sk-SK" sz="5000" dirty="0">
+                <a:solidFill>
+                  <a:schemeClr val="bg1"/>
+                </a:solidFill>
+              </a:rPr>
+              <a:t>Výber a priblíženie témy</a:t>
+            </a:r>
+          </a:p>
+        </p:txBody>
+      </p:sp>
+      <p:sp>
+        <p:nvSpPr>
+          <p:cNvPr id="3" name="Zástupný objekt pre obsah 2">
+            <a:extLst>
+              <a:ext uri="{FF2B5EF4-FFF2-40B4-BE49-F238E27FC236}">
+                <a16:creationId xmlns:a16="http://schemas.microsoft.com/office/drawing/2014/main" id="{A495B2BE-F426-8948-D071-6F8CACF3EBAA}"/>
+              </a:ext>
+            </a:extLst>
+          </p:cNvPr>
+          <p:cNvSpPr>
+            <a:spLocks noGrp="1"/>
+          </p:cNvSpPr>
+          <p:nvPr>
+            <p:ph idx="1"/>
+          </p:nvPr>
+        </p:nvSpPr>
+        <p:spPr>
+          <a:xfrm>
+            <a:off x="640080" y="2840641"/>
+            <a:ext cx="10890928" cy="3566160"/>
+          </a:xfrm>
+        </p:spPr>
+        <p:txBody>
+          <a:bodyPr>
+            <a:normAutofit/>
+          </a:bodyPr>
+          <a:lstStyle/>
+          <a:p>
+            <a:r>
+              <a:rPr lang="sk-SK" sz="2500" b="1" dirty="0">
+                <a:solidFill>
+                  <a:schemeClr val="bg1"/>
+                </a:solidFill>
+              </a:rPr>
+              <a:t>Prvotná myšlienka – prepojiť AI a programovanie</a:t>
+            </a:r>
+          </a:p>
+          <a:p>
+            <a:r>
+              <a:rPr lang="sk-SK" sz="2500" b="1" dirty="0">
+                <a:solidFill>
+                  <a:schemeClr val="bg1"/>
+                </a:solidFill>
+              </a:rPr>
+              <a:t>Skúmať limity, silné a slabé stránky</a:t>
+            </a:r>
+          </a:p>
+          <a:p>
+            <a:r>
+              <a:rPr lang="sk-SK" sz="2500" b="1" dirty="0">
+                <a:solidFill>
+                  <a:schemeClr val="bg1"/>
+                </a:solidFill>
+              </a:rPr>
+              <a:t>Generovanie zdrojového kódu </a:t>
+            </a:r>
+          </a:p>
+          <a:p>
+            <a:pPr lvl="0"/>
+            <a:r>
+              <a:rPr lang="sk-SK" sz="2500" b="1" dirty="0">
+                <a:solidFill>
+                  <a:schemeClr val="bg1"/>
+                </a:solidFill>
+              </a:rPr>
+              <a:t>Agentický AI systém - plánuje kroky, rozkladá problém, validuje riešenia, pracuje so štruktúrovanými znalosťami</a:t>
+            </a:r>
+          </a:p>
+        </p:txBody>
+      </p:sp>
+    </p:spTree>
+    <p:extLst>
+      <p:ext uri="{BB962C8B-B14F-4D97-AF65-F5344CB8AC3E}">
+        <p14:creationId xmlns:p14="http://schemas.microsoft.com/office/powerpoint/2010/main" val="4196267488"/>
+      </p:ext>
+    </p:extLst>
+  </p:cSld>
+  <p:clrMapOvr>
+    <a:masterClrMapping/>
+  </p:clrMapOvr>
+  <p:transition spd="slow">
+    <p:push dir="u"/>
+  </p:transition>
+</p:sld>
+</file>
+
+<file path=ppt/slides/slide3.xml><?xml version="1.0" encoding="utf-8"?>
+<p:sld xmlns:a="http://schemas.openxmlformats.org/drawingml/2006/main" xmlns:r="http://schemas.openxmlformats.org/officeDocument/2006/relationships" xmlns:p="http://schemas.openxmlformats.org/presentationml/2006/main">
+  <p:cSld>
+    <p:bg>
+      <p:bgPr>
+        <a:blipFill dpi="0" rotWithShape="1">
+          <a:blip r:embed="rId2">
+            <a:lum/>
+          </a:blip>
+          <a:srcRect/>
+          <a:stretch>
+            <a:fillRect/>
+          </a:stretch>
+        </a:blipFill>
+        <a:effectLst/>
+      </p:bgPr>
+    </p:bg>
+    <p:spTree>
+      <p:nvGrpSpPr>
+        <p:cNvPr id="1" name=""/>
+        <p:cNvGrpSpPr/>
+        <p:nvPr/>
+      </p:nvGrpSpPr>
+      <p:grpSpPr>
+        <a:xfrm>
+          <a:off x="0" y="0"/>
+          <a:ext cx="0" cy="0"/>
+          <a:chOff x="0" y="0"/>
+          <a:chExt cx="0" cy="0"/>
+        </a:xfrm>
+      </p:grpSpPr>
+      <p:sp>
+        <p:nvSpPr>
+          <p:cNvPr id="2" name="Nadpis 1">
+            <a:extLst>
+              <a:ext uri="{FF2B5EF4-FFF2-40B4-BE49-F238E27FC236}">
+                <a16:creationId xmlns:a16="http://schemas.microsoft.com/office/drawing/2014/main" id="{44A7E0EE-A7DC-51CA-F7F0-1E599DD3625A}"/>
+              </a:ext>
+            </a:extLst>
+          </p:cNvPr>
+          <p:cNvSpPr>
+            <a:spLocks noGrp="1"/>
+          </p:cNvSpPr>
+          <p:nvPr>
+            <p:ph type="title"/>
+          </p:nvPr>
+        </p:nvSpPr>
+        <p:spPr>
+          <a:xfrm>
+            <a:off x="660993" y="1365166"/>
+            <a:ext cx="10890929" cy="1097280"/>
+          </a:xfrm>
+        </p:spPr>
+        <p:txBody>
+          <a:bodyPr>
+            <a:normAutofit/>
+          </a:bodyPr>
+          <a:lstStyle/>
+          <a:p>
+            <a:r>
+              <a:rPr lang="sk-SK" sz="5000" dirty="0">
+                <a:solidFill>
+                  <a:schemeClr val="bg1"/>
+                </a:solidFill>
+              </a:rPr>
+              <a:t>Kontext problému</a:t>
+            </a:r>
+          </a:p>
+        </p:txBody>
+      </p:sp>
+      <p:sp>
+        <p:nvSpPr>
+          <p:cNvPr id="3" name="Zástupný objekt pre obsah 2">
+            <a:extLst>
+              <a:ext uri="{FF2B5EF4-FFF2-40B4-BE49-F238E27FC236}">
+                <a16:creationId xmlns:a16="http://schemas.microsoft.com/office/drawing/2014/main" id="{60AB0F65-A22A-B1B7-35BD-5F3D7D937FAA}"/>
+              </a:ext>
+            </a:extLst>
+          </p:cNvPr>
+          <p:cNvSpPr>
+            <a:spLocks noGrp="1"/>
+          </p:cNvSpPr>
+          <p:nvPr>
+            <p:ph idx="1"/>
+          </p:nvPr>
+        </p:nvSpPr>
+        <p:spPr>
+          <a:xfrm>
+            <a:off x="660994" y="2662545"/>
+            <a:ext cx="10890928" cy="4554701"/>
+          </a:xfrm>
+        </p:spPr>
+        <p:txBody>
+          <a:bodyPr>
+            <a:normAutofit/>
+          </a:bodyPr>
+          <a:lstStyle/>
+          <a:p>
+            <a:r>
+              <a:rPr lang="sk-SK" sz="2500" b="1" dirty="0">
+                <a:solidFill>
+                  <a:schemeClr val="bg1"/>
+                </a:solidFill>
+              </a:rPr>
+              <a:t>Posun od manuálneho vývoja k AI-asistovanému programovaniu</a:t>
+            </a:r>
+          </a:p>
+          <a:p>
+            <a:r>
+              <a:rPr lang="sk-SK" sz="2500" b="1" dirty="0">
+                <a:solidFill>
+                  <a:schemeClr val="bg1"/>
+                </a:solidFill>
+              </a:rPr>
+              <a:t>LLM ako generátory kódu, dokumentácie a návrhov riešení</a:t>
+            </a:r>
+          </a:p>
+          <a:p>
+            <a:r>
+              <a:rPr lang="sk-SK" sz="2500" b="1" dirty="0">
+                <a:solidFill>
+                  <a:schemeClr val="bg1"/>
+                </a:solidFill>
+              </a:rPr>
+              <a:t>Zmena roly vývojára – od implementácie k riadeniu a validácii</a:t>
+            </a:r>
+          </a:p>
+          <a:p>
+            <a:r>
+              <a:rPr lang="sk-SK" sz="2500" b="1" dirty="0">
+                <a:solidFill>
+                  <a:schemeClr val="bg1"/>
+                </a:solidFill>
+              </a:rPr>
+              <a:t>Obmedzenia súčasných modelov pri komplexných systémoch</a:t>
+            </a:r>
+          </a:p>
+          <a:p>
+            <a:r>
+              <a:rPr lang="sk-SK" sz="2500" b="1" dirty="0">
+                <a:solidFill>
+                  <a:schemeClr val="bg1"/>
+                </a:solidFill>
+              </a:rPr>
+              <a:t>Smerovanie k agentickým a autonómnym AI systémom</a:t>
+            </a:r>
+          </a:p>
+          <a:p>
+            <a:endParaRPr lang="sk-SK" sz="2500" dirty="0">
+              <a:solidFill>
+                <a:schemeClr val="bg1"/>
+              </a:solidFill>
+            </a:endParaRPr>
+          </a:p>
+        </p:txBody>
+      </p:sp>
+    </p:spTree>
+    <p:extLst>
+      <p:ext uri="{BB962C8B-B14F-4D97-AF65-F5344CB8AC3E}">
+        <p14:creationId xmlns:p14="http://schemas.microsoft.com/office/powerpoint/2010/main" val="2619691549"/>
+      </p:ext>
+    </p:extLst>
+  </p:cSld>
+  <p:clrMapOvr>
+    <a:masterClrMapping/>
+  </p:clrMapOvr>
+  <p:transition spd="med">
+    <p:pull/>
+  </p:transition>
+</p:sld>
+</file>
+
+<file path=ppt/slides/slide4.xml><?xml version="1.0" encoding="utf-8"?>
+<p:sld xmlns:a="http://schemas.openxmlformats.org/drawingml/2006/main" xmlns:r="http://schemas.openxmlformats.org/officeDocument/2006/relationships" xmlns:p="http://schemas.openxmlformats.org/presentationml/2006/main">
+  <p:cSld>
+    <p:bg>
+      <p:bgPr>
+        <a:blipFill dpi="0" rotWithShape="1">
+          <a:blip r:embed="rId2">
+            <a:lum/>
+          </a:blip>
+          <a:srcRect/>
+          <a:stretch>
+            <a:fillRect/>
+          </a:stretch>
+        </a:blipFill>
+        <a:effectLst/>
+      </p:bgPr>
+    </p:bg>
+    <p:spTree>
+      <p:nvGrpSpPr>
+        <p:cNvPr id="1" name="">
+          <a:extLst>
+            <a:ext uri="{FF2B5EF4-FFF2-40B4-BE49-F238E27FC236}">
+              <a16:creationId xmlns:a16="http://schemas.microsoft.com/office/drawing/2014/main" id="{62AB1382-D122-6A43-519D-57B346504861}"/>
+            </a:ext>
+          </a:extLst>
+        </p:cNvPr>
+        <p:cNvGrpSpPr/>
+        <p:nvPr/>
+      </p:nvGrpSpPr>
+      <p:grpSpPr>
+        <a:xfrm>
+          <a:off x="0" y="0"/>
+          <a:ext cx="0" cy="0"/>
+          <a:chOff x="0" y="0"/>
+          <a:chExt cx="0" cy="0"/>
+        </a:xfrm>
+      </p:grpSpPr>
+      <p:sp>
+        <p:nvSpPr>
+          <p:cNvPr id="2" name="Nadpis 1">
+            <a:extLst>
+              <a:ext uri="{FF2B5EF4-FFF2-40B4-BE49-F238E27FC236}">
+                <a16:creationId xmlns:a16="http://schemas.microsoft.com/office/drawing/2014/main" id="{73A7E189-820B-DC13-C76D-3C970BA9C1DE}"/>
+              </a:ext>
+            </a:extLst>
+          </p:cNvPr>
+          <p:cNvSpPr>
+            <a:spLocks noGrp="1"/>
+          </p:cNvSpPr>
+          <p:nvPr>
+            <p:ph type="title"/>
+          </p:nvPr>
+        </p:nvSpPr>
+        <p:spPr>
+          <a:xfrm>
+            <a:off x="640079" y="1107990"/>
+            <a:ext cx="10890929" cy="1097280"/>
+          </a:xfrm>
+        </p:spPr>
+        <p:txBody>
+          <a:bodyPr>
+            <a:normAutofit/>
+          </a:bodyPr>
+          <a:lstStyle/>
+          <a:p>
+            <a:r>
+              <a:rPr lang="sk-SK" sz="5000" dirty="0">
+                <a:solidFill>
+                  <a:schemeClr val="bg1"/>
+                </a:solidFill>
+              </a:rPr>
+              <a:t>LLM pri generovaní kódu</a:t>
+            </a:r>
+          </a:p>
+        </p:txBody>
+      </p:sp>
+      <p:sp>
+        <p:nvSpPr>
+          <p:cNvPr id="3" name="Zástupný objekt pre obsah 2">
+            <a:extLst>
+              <a:ext uri="{FF2B5EF4-FFF2-40B4-BE49-F238E27FC236}">
+                <a16:creationId xmlns:a16="http://schemas.microsoft.com/office/drawing/2014/main" id="{018D513B-715C-2C90-9BBE-CC28CC12BD20}"/>
+              </a:ext>
+            </a:extLst>
+          </p:cNvPr>
+          <p:cNvSpPr>
+            <a:spLocks noGrp="1"/>
+          </p:cNvSpPr>
+          <p:nvPr>
+            <p:ph idx="1"/>
+          </p:nvPr>
+        </p:nvSpPr>
+        <p:spPr>
+          <a:xfrm>
+            <a:off x="640079" y="2076757"/>
+            <a:ext cx="10890928" cy="4781243"/>
+          </a:xfrm>
+        </p:spPr>
+        <p:txBody>
+          <a:bodyPr>
+            <a:normAutofit fontScale="62500" lnSpcReduction="20000"/>
+          </a:bodyPr>
+          <a:lstStyle/>
+          <a:p>
+            <a:pPr marL="0" indent="0">
+              <a:buNone/>
+            </a:pPr>
+            <a:r>
+              <a:rPr lang="sk-SK" sz="3600" b="1" dirty="0">
+                <a:solidFill>
+                  <a:schemeClr val="bg1"/>
+                </a:solidFill>
+              </a:rPr>
+              <a:t>Silné stránky:	</a:t>
+            </a:r>
+          </a:p>
+          <a:p>
+            <a:pPr lvl="1"/>
+            <a:r>
+              <a:rPr lang="sk-SK" sz="3600" b="1" dirty="0">
+                <a:solidFill>
+                  <a:schemeClr val="bg1"/>
+                </a:solidFill>
+              </a:rPr>
+              <a:t>generovanie krátkych funkcií</a:t>
+            </a:r>
+          </a:p>
+          <a:p>
+            <a:pPr lvl="1"/>
+            <a:r>
+              <a:rPr lang="sk-SK" sz="3600" b="1" dirty="0">
+                <a:solidFill>
+                  <a:schemeClr val="bg1"/>
+                </a:solidFill>
+              </a:rPr>
+              <a:t>dopĺňanie existujúceho kódu</a:t>
+            </a:r>
+          </a:p>
+          <a:p>
+            <a:pPr lvl="1"/>
+            <a:r>
+              <a:rPr lang="sk-SK" sz="3600" b="1" dirty="0">
+                <a:solidFill>
+                  <a:schemeClr val="bg1"/>
+                </a:solidFill>
+              </a:rPr>
+              <a:t>tvorba dokumentácie</a:t>
+            </a:r>
+          </a:p>
+          <a:p>
+            <a:pPr lvl="1"/>
+            <a:r>
+              <a:rPr lang="sk-SK" sz="3600" b="1" dirty="0">
+                <a:solidFill>
+                  <a:schemeClr val="bg1"/>
+                </a:solidFill>
+              </a:rPr>
+              <a:t>rýchle prototypovanie</a:t>
+            </a:r>
+          </a:p>
+          <a:p>
+            <a:pPr marL="0" indent="0">
+              <a:buNone/>
+            </a:pPr>
+            <a:r>
+              <a:rPr lang="sk-SK" sz="3600" b="1" dirty="0">
+                <a:solidFill>
+                  <a:schemeClr val="bg1"/>
+                </a:solidFill>
+              </a:rPr>
+              <a:t>Slabé stránky:</a:t>
+            </a:r>
+          </a:p>
+          <a:p>
+            <a:pPr lvl="1"/>
+            <a:r>
+              <a:rPr lang="sk-SK" sz="3600" b="1" dirty="0">
+                <a:solidFill>
+                  <a:schemeClr val="bg1"/>
+                </a:solidFill>
+              </a:rPr>
+              <a:t>logické chyby</a:t>
+            </a:r>
+          </a:p>
+          <a:p>
+            <a:pPr lvl="1"/>
+            <a:r>
+              <a:rPr lang="sk-SK" sz="3600" b="1" dirty="0">
+                <a:solidFill>
+                  <a:schemeClr val="bg1"/>
+                </a:solidFill>
+              </a:rPr>
+              <a:t>problém s globálnym kontextom</a:t>
+            </a:r>
+          </a:p>
+          <a:p>
+            <a:pPr lvl="1"/>
+            <a:r>
+              <a:rPr lang="sk-SK" sz="3600" b="1" dirty="0">
+                <a:solidFill>
+                  <a:schemeClr val="bg1"/>
+                </a:solidFill>
+              </a:rPr>
+              <a:t>navrhovanie architektúry</a:t>
+            </a:r>
+          </a:p>
+          <a:p>
+            <a:pPr lvl="1"/>
+            <a:r>
+              <a:rPr lang="sk-SK" sz="3600" b="1" dirty="0">
+                <a:solidFill>
+                  <a:schemeClr val="bg1"/>
+                </a:solidFill>
+              </a:rPr>
+              <a:t>konzistencia medzi funkciami pri komplexných úlohách</a:t>
+            </a:r>
+          </a:p>
+          <a:p>
+            <a:pPr lvl="1"/>
+            <a:r>
+              <a:rPr lang="sk-SK" sz="3600" b="1" dirty="0">
+                <a:solidFill>
+                  <a:schemeClr val="bg1"/>
+                </a:solidFill>
+              </a:rPr>
+              <a:t>halucinácie</a:t>
+            </a:r>
+          </a:p>
+          <a:p>
+            <a:pPr marL="0" indent="0">
+              <a:buNone/>
+            </a:pPr>
+            <a:endParaRPr lang="sk-SK" sz="2500" dirty="0">
+              <a:solidFill>
+                <a:schemeClr val="bg1"/>
+              </a:solidFill>
+            </a:endParaRPr>
+          </a:p>
+        </p:txBody>
+      </p:sp>
+    </p:spTree>
+    <p:extLst>
+      <p:ext uri="{BB962C8B-B14F-4D97-AF65-F5344CB8AC3E}">
+        <p14:creationId xmlns:p14="http://schemas.microsoft.com/office/powerpoint/2010/main" val="3701397997"/>
+      </p:ext>
+    </p:extLst>
+  </p:cSld>
+  <p:clrMapOvr>
+    <a:masterClrMapping/>
+  </p:clrMapOvr>
+  <p:transition spd="med">
+    <p:pull/>
+  </p:transition>
+</p:sld>
+</file>
+
+<file path=ppt/slides/slide5.xml><?xml version="1.0" encoding="utf-8"?>
+<p:sld xmlns:a="http://schemas.openxmlformats.org/drawingml/2006/main" xmlns:r="http://schemas.openxmlformats.org/officeDocument/2006/relationships" xmlns:p="http://schemas.openxmlformats.org/presentationml/2006/main">
+  <p:cSld>
+    <p:bg>
+      <p:bgPr>
+        <a:blipFill dpi="0" rotWithShape="1">
+          <a:blip r:embed="rId2">
+            <a:lum/>
+          </a:blip>
+          <a:srcRect/>
+          <a:stretch>
+            <a:fillRect/>
+          </a:stretch>
+        </a:blipFill>
+        <a:effectLst/>
+      </p:bgPr>
+    </p:bg>
+    <p:spTree>
+      <p:nvGrpSpPr>
+        <p:cNvPr id="1" name="">
+          <a:extLst>
+            <a:ext uri="{FF2B5EF4-FFF2-40B4-BE49-F238E27FC236}">
+              <a16:creationId xmlns:a16="http://schemas.microsoft.com/office/drawing/2014/main" id="{FD564ACF-8F14-2D70-574E-04B27FE13874}"/>
+            </a:ext>
+          </a:extLst>
+        </p:cNvPr>
+        <p:cNvGrpSpPr/>
+        <p:nvPr/>
+      </p:nvGrpSpPr>
+      <p:grpSpPr>
+        <a:xfrm>
+          <a:off x="0" y="0"/>
+          <a:ext cx="0" cy="0"/>
+          <a:chOff x="0" y="0"/>
+          <a:chExt cx="0" cy="0"/>
+        </a:xfrm>
+      </p:grpSpPr>
+      <p:sp>
+        <p:nvSpPr>
+          <p:cNvPr id="2" name="Nadpis 1">
+            <a:extLst>
+              <a:ext uri="{FF2B5EF4-FFF2-40B4-BE49-F238E27FC236}">
+                <a16:creationId xmlns:a16="http://schemas.microsoft.com/office/drawing/2014/main" id="{CCA9AEA4-02C5-C759-E3C4-AFC419CFD871}"/>
+              </a:ext>
+            </a:extLst>
+          </p:cNvPr>
+          <p:cNvSpPr>
+            <a:spLocks noGrp="1"/>
+          </p:cNvSpPr>
+          <p:nvPr>
+            <p:ph type="title"/>
+          </p:nvPr>
+        </p:nvSpPr>
+        <p:spPr>
+          <a:xfrm>
+            <a:off x="640078" y="1400883"/>
+            <a:ext cx="10890929" cy="1097280"/>
+          </a:xfrm>
+        </p:spPr>
+        <p:txBody>
+          <a:bodyPr>
+            <a:normAutofit/>
+          </a:bodyPr>
+          <a:lstStyle/>
+          <a:p>
+            <a:r>
+              <a:rPr lang="sk-SK" sz="5000" dirty="0">
+                <a:solidFill>
+                  <a:schemeClr val="bg1"/>
+                </a:solidFill>
+              </a:rPr>
+              <a:t>Prístupy k zlepšeniu generovania kódu</a:t>
+            </a:r>
+          </a:p>
+        </p:txBody>
+      </p:sp>
+      <p:sp>
+        <p:nvSpPr>
+          <p:cNvPr id="3" name="Zástupný objekt pre obsah 2">
+            <a:extLst>
+              <a:ext uri="{FF2B5EF4-FFF2-40B4-BE49-F238E27FC236}">
+                <a16:creationId xmlns:a16="http://schemas.microsoft.com/office/drawing/2014/main" id="{206B3F5D-51E8-FAE7-14E3-4198F0F7AD51}"/>
+              </a:ext>
+            </a:extLst>
+          </p:cNvPr>
+          <p:cNvSpPr>
+            <a:spLocks noGrp="1"/>
+          </p:cNvSpPr>
+          <p:nvPr>
+            <p:ph idx="1"/>
+          </p:nvPr>
+        </p:nvSpPr>
+        <p:spPr>
+          <a:xfrm>
+            <a:off x="640079" y="2776844"/>
+            <a:ext cx="10890928" cy="4554701"/>
+          </a:xfrm>
+        </p:spPr>
+        <p:txBody>
+          <a:bodyPr>
+            <a:normAutofit/>
+          </a:bodyPr>
+          <a:lstStyle/>
+          <a:p>
+            <a:r>
+              <a:rPr lang="sk-SK" sz="2500" b="1" dirty="0">
+                <a:solidFill>
+                  <a:schemeClr val="bg1"/>
+                </a:solidFill>
+              </a:rPr>
+              <a:t>Prompt engineering</a:t>
+            </a:r>
+          </a:p>
+          <a:p>
+            <a:r>
+              <a:rPr lang="sk-SK" sz="2500" b="1" dirty="0">
+                <a:solidFill>
+                  <a:schemeClr val="bg1"/>
+                </a:solidFill>
+              </a:rPr>
+              <a:t>In-context learning</a:t>
+            </a:r>
+          </a:p>
+          <a:p>
+            <a:r>
+              <a:rPr lang="sk-SK" sz="2500" b="1" dirty="0">
+                <a:solidFill>
+                  <a:schemeClr val="bg1"/>
+                </a:solidFill>
+              </a:rPr>
+              <a:t>Chain-of-Thought prístup</a:t>
+            </a:r>
+          </a:p>
+          <a:p>
+            <a:r>
+              <a:rPr lang="sk-SK" sz="2500" b="1" dirty="0">
+                <a:solidFill>
+                  <a:schemeClr val="bg1"/>
+                </a:solidFill>
+              </a:rPr>
+              <a:t>Fine-tuning a doménová adaptácia</a:t>
+            </a:r>
+          </a:p>
+          <a:p>
+            <a:r>
+              <a:rPr lang="sk-SK" sz="2500" b="1" dirty="0">
+                <a:solidFill>
+                  <a:schemeClr val="bg1"/>
+                </a:solidFill>
+              </a:rPr>
+              <a:t>Retrieval-Augmented Generation (RAG)</a:t>
+            </a:r>
+          </a:p>
+          <a:p>
+            <a:endParaRPr lang="sk-SK" sz="2500" dirty="0">
+              <a:solidFill>
+                <a:schemeClr val="bg1"/>
+              </a:solidFill>
+            </a:endParaRPr>
+          </a:p>
+          <a:p>
+            <a:endParaRPr lang="sk-SK" sz="2500" dirty="0">
+              <a:solidFill>
+                <a:schemeClr val="bg1"/>
+              </a:solidFill>
+            </a:endParaRPr>
+          </a:p>
+        </p:txBody>
+      </p:sp>
+    </p:spTree>
+    <p:extLst>
+      <p:ext uri="{BB962C8B-B14F-4D97-AF65-F5344CB8AC3E}">
+        <p14:creationId xmlns:p14="http://schemas.microsoft.com/office/powerpoint/2010/main" val="3888856438"/>
+      </p:ext>
+    </p:extLst>
+  </p:cSld>
+  <p:clrMapOvr>
+    <a:masterClrMapping/>
+  </p:clrMapOvr>
+  <p:transition spd="med">
+    <p:pull/>
+  </p:transition>
+</p:sld>
+</file>
+
+<file path=ppt/slides/slide6.xml><?xml version="1.0" encoding="utf-8"?>
+<p:sld xmlns:a="http://schemas.openxmlformats.org/drawingml/2006/main" xmlns:r="http://schemas.openxmlformats.org/officeDocument/2006/relationships" xmlns:p="http://schemas.openxmlformats.org/presentationml/2006/main">
+  <p:cSld>
+    <p:bg>
+      <p:bgPr>
+        <a:blipFill dpi="0" rotWithShape="1">
+          <a:blip r:embed="rId2">
+            <a:lum/>
+          </a:blip>
+          <a:srcRect/>
+          <a:stretch>
+            <a:fillRect/>
+          </a:stretch>
+        </a:blipFill>
+        <a:effectLst/>
+      </p:bgPr>
+    </p:bg>
+    <p:spTree>
+      <p:nvGrpSpPr>
+        <p:cNvPr id="1" name="">
+          <a:extLst>
+            <a:ext uri="{FF2B5EF4-FFF2-40B4-BE49-F238E27FC236}">
+              <a16:creationId xmlns:a16="http://schemas.microsoft.com/office/drawing/2014/main" id="{96AD5128-B43E-D578-BDC1-C9B179658E29}"/>
+            </a:ext>
+          </a:extLst>
+        </p:cNvPr>
+        <p:cNvGrpSpPr/>
+        <p:nvPr/>
+      </p:nvGrpSpPr>
+      <p:grpSpPr>
+        <a:xfrm>
+          <a:off x="0" y="0"/>
+          <a:ext cx="0" cy="0"/>
+          <a:chOff x="0" y="0"/>
+          <a:chExt cx="0" cy="0"/>
+        </a:xfrm>
+      </p:grpSpPr>
+      <p:sp>
+        <p:nvSpPr>
+          <p:cNvPr id="2" name="Nadpis 1">
+            <a:extLst>
+              <a:ext uri="{FF2B5EF4-FFF2-40B4-BE49-F238E27FC236}">
+                <a16:creationId xmlns:a16="http://schemas.microsoft.com/office/drawing/2014/main" id="{AB7A802D-F5FC-A5C7-A613-18412A39FC5E}"/>
+              </a:ext>
+            </a:extLst>
+          </p:cNvPr>
+          <p:cNvSpPr>
+            <a:spLocks noGrp="1"/>
+          </p:cNvSpPr>
+          <p:nvPr>
+            <p:ph type="title"/>
+          </p:nvPr>
+        </p:nvSpPr>
+        <p:spPr>
+          <a:xfrm>
+            <a:off x="640078" y="1322174"/>
+            <a:ext cx="10890929" cy="1097280"/>
+          </a:xfrm>
+        </p:spPr>
+        <p:txBody>
+          <a:bodyPr>
+            <a:normAutofit/>
+          </a:bodyPr>
+          <a:lstStyle/>
+          <a:p>
+            <a:r>
+              <a:rPr lang="sk-SK" sz="5000" dirty="0">
+                <a:solidFill>
+                  <a:schemeClr val="bg1"/>
+                </a:solidFill>
+              </a:rPr>
+              <a:t>Cieľ práce</a:t>
+            </a:r>
+          </a:p>
+        </p:txBody>
+      </p:sp>
+      <p:sp>
+        <p:nvSpPr>
+          <p:cNvPr id="3" name="Zástupný objekt pre obsah 2">
+            <a:extLst>
+              <a:ext uri="{FF2B5EF4-FFF2-40B4-BE49-F238E27FC236}">
+                <a16:creationId xmlns:a16="http://schemas.microsoft.com/office/drawing/2014/main" id="{1F6AB18E-A40A-4A5E-7D28-2D74ED4B70DA}"/>
+              </a:ext>
+            </a:extLst>
+          </p:cNvPr>
+          <p:cNvSpPr>
+            <a:spLocks noGrp="1"/>
+          </p:cNvSpPr>
+          <p:nvPr>
+            <p:ph idx="1"/>
+          </p:nvPr>
+        </p:nvSpPr>
+        <p:spPr>
+          <a:xfrm>
+            <a:off x="640079" y="2496887"/>
+            <a:ext cx="10890928" cy="4554701"/>
+          </a:xfrm>
+        </p:spPr>
+        <p:txBody>
+          <a:bodyPr>
+            <a:normAutofit/>
+          </a:bodyPr>
+          <a:lstStyle/>
+          <a:p>
+            <a:r>
+              <a:rPr lang="sk-SK" sz="2500" b="1" dirty="0">
+                <a:solidFill>
+                  <a:schemeClr val="bg1"/>
+                </a:solidFill>
+              </a:rPr>
+              <a:t>Transformácia zadania na prípad použitia</a:t>
+            </a:r>
+          </a:p>
+          <a:p>
+            <a:r>
+              <a:rPr lang="sk-SK" sz="2500" b="1" dirty="0">
+                <a:solidFill>
+                  <a:schemeClr val="bg1"/>
+                </a:solidFill>
+              </a:rPr>
+              <a:t>Rozklad na funkčné jednotky</a:t>
+            </a:r>
+          </a:p>
+          <a:p>
+            <a:r>
+              <a:rPr lang="sk-SK" sz="2500" b="1" dirty="0">
+                <a:solidFill>
+                  <a:schemeClr val="bg1"/>
+                </a:solidFill>
+              </a:rPr>
+              <a:t>Generovanie implementácií</a:t>
+            </a:r>
+          </a:p>
+          <a:p>
+            <a:r>
+              <a:rPr lang="sk-SK" sz="2500" b="1" dirty="0">
+                <a:solidFill>
+                  <a:schemeClr val="bg1"/>
+                </a:solidFill>
+              </a:rPr>
+              <a:t>Validácia funkcií a programu</a:t>
+            </a:r>
+          </a:p>
+          <a:p>
+            <a:r>
+              <a:rPr lang="sk-SK" sz="2500" b="1" dirty="0">
+                <a:solidFill>
+                  <a:schemeClr val="bg1"/>
+                </a:solidFill>
+              </a:rPr>
+              <a:t>Integrácia výsledného riešenia</a:t>
+            </a:r>
+          </a:p>
+          <a:p>
+            <a:r>
+              <a:rPr lang="sk-SK" sz="2500" b="1" dirty="0">
+                <a:solidFill>
+                  <a:schemeClr val="bg1"/>
+                </a:solidFill>
+              </a:rPr>
+              <a:t>Využitie GraphRAG znalostnej bázy a jej dopĺňanie </a:t>
+            </a:r>
+          </a:p>
+          <a:p>
+            <a:pPr marL="0" indent="0">
+              <a:buNone/>
+            </a:pPr>
+            <a:endParaRPr lang="sk-SK" sz="2500" dirty="0">
+              <a:solidFill>
+                <a:schemeClr val="bg1"/>
+              </a:solidFill>
+            </a:endParaRPr>
+          </a:p>
+        </p:txBody>
+      </p:sp>
+    </p:spTree>
+    <p:extLst>
+      <p:ext uri="{BB962C8B-B14F-4D97-AF65-F5344CB8AC3E}">
+        <p14:creationId xmlns:p14="http://schemas.microsoft.com/office/powerpoint/2010/main" val="996101097"/>
+      </p:ext>
+    </p:extLst>
+  </p:cSld>
+  <p:clrMapOvr>
+    <a:masterClrMapping/>
+  </p:clrMapOvr>
+  <p:transition spd="med">
+    <p:pull/>
+  </p:transition>
+</p:sld>
+</file>
+
+<file path=ppt/slides/slide7.xml><?xml version="1.0" encoding="utf-8"?>
+<p:sld xmlns:a="http://schemas.openxmlformats.org/drawingml/2006/main" xmlns:r="http://schemas.openxmlformats.org/officeDocument/2006/relationships" xmlns:p="http://schemas.openxmlformats.org/presentationml/2006/main">
+  <p:cSld>
+    <p:bg>
+      <p:bgPr>
+        <a:blipFill dpi="0" rotWithShape="1">
+          <a:blip r:embed="rId2">
+            <a:lum/>
+          </a:blip>
+          <a:srcRect/>
+          <a:stretch>
+            <a:fillRect/>
+          </a:stretch>
+        </a:blipFill>
+        <a:effectLst/>
+      </p:bgPr>
+    </p:bg>
+    <p:spTree>
+      <p:nvGrpSpPr>
+        <p:cNvPr id="1" name="">
+          <a:extLst>
+            <a:ext uri="{FF2B5EF4-FFF2-40B4-BE49-F238E27FC236}">
+              <a16:creationId xmlns:a16="http://schemas.microsoft.com/office/drawing/2014/main" id="{19D827A6-DA40-E7CC-55DB-D36739E086F0}"/>
+            </a:ext>
+          </a:extLst>
+        </p:cNvPr>
+        <p:cNvGrpSpPr/>
+        <p:nvPr/>
+      </p:nvGrpSpPr>
+      <p:grpSpPr>
+        <a:xfrm>
+          <a:off x="0" y="0"/>
+          <a:ext cx="0" cy="0"/>
+          <a:chOff x="0" y="0"/>
+          <a:chExt cx="0" cy="0"/>
+        </a:xfrm>
+      </p:grpSpPr>
+      <p:sp>
+        <p:nvSpPr>
+          <p:cNvPr id="2" name="Nadpis 1">
+            <a:extLst>
+              <a:ext uri="{FF2B5EF4-FFF2-40B4-BE49-F238E27FC236}">
+                <a16:creationId xmlns:a16="http://schemas.microsoft.com/office/drawing/2014/main" id="{95BF6DEA-4200-01A9-9ACA-49D3E78C16B9}"/>
+              </a:ext>
+            </a:extLst>
+          </p:cNvPr>
+          <p:cNvSpPr>
+            <a:spLocks noGrp="1"/>
+          </p:cNvSpPr>
+          <p:nvPr>
+            <p:ph type="title"/>
+          </p:nvPr>
+        </p:nvSpPr>
+        <p:spPr>
+          <a:xfrm>
+            <a:off x="640078" y="1429330"/>
+            <a:ext cx="10890929" cy="1097280"/>
+          </a:xfrm>
+        </p:spPr>
+        <p:txBody>
+          <a:bodyPr>
+            <a:normAutofit/>
+          </a:bodyPr>
+          <a:lstStyle/>
+          <a:p>
+            <a:r>
+              <a:rPr lang="sk-SK" sz="5000" dirty="0">
+                <a:solidFill>
+                  <a:schemeClr val="bg1"/>
+                </a:solidFill>
+              </a:rPr>
+              <a:t>Aktuálny stav</a:t>
+            </a:r>
+          </a:p>
+        </p:txBody>
+      </p:sp>
+      <p:sp>
+        <p:nvSpPr>
+          <p:cNvPr id="3" name="Zástupný objekt pre obsah 2">
+            <a:extLst>
+              <a:ext uri="{FF2B5EF4-FFF2-40B4-BE49-F238E27FC236}">
+                <a16:creationId xmlns:a16="http://schemas.microsoft.com/office/drawing/2014/main" id="{76FB301B-5277-1B6F-5CEE-3D318842F5B0}"/>
+              </a:ext>
+            </a:extLst>
+          </p:cNvPr>
+          <p:cNvSpPr>
+            <a:spLocks noGrp="1"/>
+          </p:cNvSpPr>
+          <p:nvPr>
+            <p:ph idx="1"/>
+          </p:nvPr>
+        </p:nvSpPr>
+        <p:spPr>
+          <a:xfrm>
+            <a:off x="640078" y="2818355"/>
+            <a:ext cx="10890928" cy="4554701"/>
+          </a:xfrm>
+        </p:spPr>
+        <p:txBody>
+          <a:bodyPr>
+            <a:normAutofit/>
+          </a:bodyPr>
+          <a:lstStyle/>
+          <a:p>
+            <a:r>
+              <a:rPr lang="sk-SK" sz="2500" b="1" dirty="0">
+                <a:solidFill>
+                  <a:schemeClr val="bg1"/>
+                </a:solidFill>
+              </a:rPr>
+              <a:t>Vypracovaná analytická kapitola</a:t>
+            </a:r>
+          </a:p>
+          <a:p>
+            <a:r>
+              <a:rPr lang="sk-SK" sz="2500" b="1" dirty="0">
+                <a:solidFill>
+                  <a:schemeClr val="bg1"/>
+                </a:solidFill>
+              </a:rPr>
+              <a:t>Implementovaná prvá verzia pipeline</a:t>
+            </a:r>
+          </a:p>
+          <a:p>
+            <a:r>
+              <a:rPr lang="sk-SK" sz="2500" b="1" dirty="0">
+                <a:solidFill>
+                  <a:schemeClr val="bg1"/>
+                </a:solidFill>
+              </a:rPr>
+              <a:t>Funkčné generovanie, validácia funkcií a integrácia funkcií</a:t>
+            </a:r>
+          </a:p>
+          <a:p>
+            <a:r>
+              <a:rPr lang="sk-SK" sz="2500" b="1" dirty="0">
+                <a:solidFill>
+                  <a:schemeClr val="bg1"/>
+                </a:solidFill>
+              </a:rPr>
+              <a:t>Integrácia Neo4j a GraphRAG</a:t>
+            </a:r>
+          </a:p>
+          <a:p>
+            <a:r>
+              <a:rPr lang="sk-SK" sz="2500" b="1" dirty="0">
+                <a:solidFill>
+                  <a:schemeClr val="bg1"/>
+                </a:solidFill>
+              </a:rPr>
+              <a:t>Dopĺňanie znalostnej bázy</a:t>
+            </a:r>
+          </a:p>
+        </p:txBody>
+      </p:sp>
+    </p:spTree>
+    <p:extLst>
+      <p:ext uri="{BB962C8B-B14F-4D97-AF65-F5344CB8AC3E}">
+        <p14:creationId xmlns:p14="http://schemas.microsoft.com/office/powerpoint/2010/main" val="3413734222"/>
+      </p:ext>
+    </p:extLst>
+  </p:cSld>
+  <p:clrMapOvr>
+    <a:masterClrMapping/>
+  </p:clrMapOvr>
+  <p:transition spd="med">
+    <p:pull/>
+  </p:transition>
+</p:sld>
+</file>
+
+<file path=ppt/slides/slide8.xml><?xml version="1.0" encoding="utf-8"?>
+<p:sld xmlns:a="http://schemas.openxmlformats.org/drawingml/2006/main" xmlns:r="http://schemas.openxmlformats.org/officeDocument/2006/relationships" xmlns:p="http://schemas.openxmlformats.org/presentationml/2006/main">
+  <p:cSld>
+    <p:bg>
+      <p:bgPr>
+        <a:blipFill dpi="0" rotWithShape="1">
+          <a:blip r:embed="rId2">
+            <a:lum/>
+          </a:blip>
+          <a:srcRect/>
+          <a:stretch>
+            <a:fillRect/>
+          </a:stretch>
+        </a:blipFill>
+        <a:effectLst/>
+      </p:bgPr>
+    </p:bg>
+    <p:spTree>
+      <p:nvGrpSpPr>
+        <p:cNvPr id="1" name="">
+          <a:extLst>
+            <a:ext uri="{FF2B5EF4-FFF2-40B4-BE49-F238E27FC236}">
+              <a16:creationId xmlns:a16="http://schemas.microsoft.com/office/drawing/2014/main" id="{46A998F1-5261-87B3-ABCF-4D7E56995CA3}"/>
+            </a:ext>
+          </a:extLst>
+        </p:cNvPr>
+        <p:cNvGrpSpPr/>
+        <p:nvPr/>
+      </p:nvGrpSpPr>
+      <p:grpSpPr>
+        <a:xfrm>
+          <a:off x="0" y="0"/>
+          <a:ext cx="0" cy="0"/>
+          <a:chOff x="0" y="0"/>
+          <a:chExt cx="0" cy="0"/>
+        </a:xfrm>
+      </p:grpSpPr>
+      <p:sp>
+        <p:nvSpPr>
+          <p:cNvPr id="2" name="Nadpis 1">
+            <a:extLst>
+              <a:ext uri="{FF2B5EF4-FFF2-40B4-BE49-F238E27FC236}">
+                <a16:creationId xmlns:a16="http://schemas.microsoft.com/office/drawing/2014/main" id="{CA3A9AE8-31E6-8EA0-4FD4-A571EE2B8ED4}"/>
+              </a:ext>
+            </a:extLst>
+          </p:cNvPr>
+          <p:cNvSpPr>
+            <a:spLocks noGrp="1"/>
+          </p:cNvSpPr>
+          <p:nvPr>
+            <p:ph type="title"/>
+          </p:nvPr>
+        </p:nvSpPr>
+        <p:spPr>
+          <a:xfrm>
+            <a:off x="640077" y="1443618"/>
+            <a:ext cx="10890929" cy="1097280"/>
+          </a:xfrm>
+        </p:spPr>
+        <p:txBody>
+          <a:bodyPr>
+            <a:normAutofit/>
+          </a:bodyPr>
+          <a:lstStyle/>
+          <a:p>
+            <a:r>
+              <a:rPr lang="sk-SK" sz="5000" dirty="0">
+                <a:solidFill>
+                  <a:schemeClr val="bg1"/>
+                </a:solidFill>
+              </a:rPr>
+              <a:t>Plánované doplnenie</a:t>
+            </a:r>
+          </a:p>
+        </p:txBody>
+      </p:sp>
+      <p:sp>
+        <p:nvSpPr>
+          <p:cNvPr id="3" name="Zástupný objekt pre obsah 2">
+            <a:extLst>
+              <a:ext uri="{FF2B5EF4-FFF2-40B4-BE49-F238E27FC236}">
+                <a16:creationId xmlns:a16="http://schemas.microsoft.com/office/drawing/2014/main" id="{388B146F-F109-C0C3-9768-A3A49FC12928}"/>
+              </a:ext>
+            </a:extLst>
+          </p:cNvPr>
+          <p:cNvSpPr>
+            <a:spLocks noGrp="1"/>
+          </p:cNvSpPr>
+          <p:nvPr>
+            <p:ph idx="1"/>
+          </p:nvPr>
+        </p:nvSpPr>
+        <p:spPr>
+          <a:xfrm>
+            <a:off x="640078" y="2825499"/>
+            <a:ext cx="10890928" cy="4554701"/>
+          </a:xfrm>
+        </p:spPr>
+        <p:txBody>
+          <a:bodyPr>
+            <a:normAutofit/>
+          </a:bodyPr>
+          <a:lstStyle/>
+          <a:p>
+            <a:r>
+              <a:rPr lang="sk-SK" sz="2500" b="1" dirty="0">
+                <a:solidFill>
+                  <a:schemeClr val="bg1"/>
+                </a:solidFill>
+              </a:rPr>
+              <a:t>Zdokonalenie súčasnej verzie</a:t>
+            </a:r>
+          </a:p>
+          <a:p>
+            <a:r>
+              <a:rPr lang="sk-SK" sz="2500" b="1" dirty="0">
+                <a:solidFill>
+                  <a:schemeClr val="bg1"/>
+                </a:solidFill>
+              </a:rPr>
+              <a:t>Návrh testovacích scenárov</a:t>
+            </a:r>
+          </a:p>
+          <a:p>
+            <a:r>
+              <a:rPr lang="sk-SK" sz="2500" b="1" dirty="0">
+                <a:solidFill>
+                  <a:schemeClr val="bg1"/>
+                </a:solidFill>
+              </a:rPr>
+              <a:t>Definovanie metrík kvality</a:t>
+            </a:r>
+          </a:p>
+          <a:p>
+            <a:r>
+              <a:rPr lang="sk-SK" sz="2500" b="1" dirty="0">
+                <a:solidFill>
+                  <a:schemeClr val="bg1"/>
+                </a:solidFill>
+              </a:rPr>
+              <a:t>Porovnanie s klasickým LLM prístupom</a:t>
+            </a:r>
+          </a:p>
+          <a:p>
+            <a:r>
+              <a:rPr lang="sk-SK" sz="2500" b="1" dirty="0">
+                <a:solidFill>
+                  <a:schemeClr val="bg1"/>
+                </a:solidFill>
+              </a:rPr>
+              <a:t>Vyhodnotenie úspešnosti</a:t>
+            </a:r>
+          </a:p>
+          <a:p>
+            <a:endParaRPr lang="sk-SK" sz="2500" dirty="0">
+              <a:solidFill>
+                <a:schemeClr val="bg1"/>
+              </a:solidFill>
+            </a:endParaRPr>
+          </a:p>
+        </p:txBody>
+      </p:sp>
+    </p:spTree>
+    <p:extLst>
+      <p:ext uri="{BB962C8B-B14F-4D97-AF65-F5344CB8AC3E}">
+        <p14:creationId xmlns:p14="http://schemas.microsoft.com/office/powerpoint/2010/main" val="167047848"/>
+      </p:ext>
+    </p:extLst>
+  </p:cSld>
+  <p:clrMapOvr>
+    <a:masterClrMapping/>
+  </p:clrMapOvr>
+  <p:transition spd="med">
+    <p:pull/>
+  </p:transition>
+</p:sld>
+</file>
+
+<file path=ppt/slides/slide9.xml><?xml version="1.0" encoding="utf-8"?>
 <p:sld xmlns:a="http://schemas.openxmlformats.org/drawingml/2006/main" xmlns:r="http://schemas.openxmlformats.org/officeDocument/2006/relationships" xmlns:p="http://schemas.openxmlformats.org/presentationml/2006/main">
   <p:cSld>
     <p:bg>
@@ -4749,1697 +6068,6 @@
       <p:bldP spid="3" grpId="0" build="p"/>
     </p:bldLst>
   </p:timing>
-</p:sld>
-</file>
-
-<file path=ppt/slides/slide2.xml><?xml version="1.0" encoding="utf-8"?>
-<p:sld xmlns:a="http://schemas.openxmlformats.org/drawingml/2006/main" xmlns:r="http://schemas.openxmlformats.org/officeDocument/2006/relationships" xmlns:p="http://schemas.openxmlformats.org/presentationml/2006/main">
-  <p:cSld>
-    <p:bg>
-      <p:bgPr>
-        <a:blipFill dpi="0" rotWithShape="1">
-          <a:blip r:embed="rId2">
-            <a:lum/>
-          </a:blip>
-          <a:srcRect/>
-          <a:stretch>
-            <a:fillRect/>
-          </a:stretch>
-        </a:blipFill>
-        <a:effectLst/>
-      </p:bgPr>
-    </p:bg>
-    <p:spTree>
-      <p:nvGrpSpPr>
-        <p:cNvPr id="1" name="">
-          <a:extLst>
-            <a:ext uri="{FF2B5EF4-FFF2-40B4-BE49-F238E27FC236}">
-              <a16:creationId xmlns:a16="http://schemas.microsoft.com/office/drawing/2014/main" id="{FF12DF51-31F7-EE61-9E07-14E8DA39FF69}"/>
-            </a:ext>
-          </a:extLst>
-        </p:cNvPr>
-        <p:cNvGrpSpPr/>
-        <p:nvPr/>
-      </p:nvGrpSpPr>
-      <p:grpSpPr>
-        <a:xfrm>
-          <a:off x="0" y="0"/>
-          <a:ext cx="0" cy="0"/>
-          <a:chOff x="0" y="0"/>
-          <a:chExt cx="0" cy="0"/>
-        </a:xfrm>
-      </p:grpSpPr>
-      <p:sp>
-        <p:nvSpPr>
-          <p:cNvPr id="2" name="Nadpis 1">
-            <a:extLst>
-              <a:ext uri="{FF2B5EF4-FFF2-40B4-BE49-F238E27FC236}">
-                <a16:creationId xmlns:a16="http://schemas.microsoft.com/office/drawing/2014/main" id="{097AE61D-E1B8-8517-B747-99902A89884A}"/>
-              </a:ext>
-            </a:extLst>
-          </p:cNvPr>
-          <p:cNvSpPr>
-            <a:spLocks noGrp="1"/>
-          </p:cNvSpPr>
-          <p:nvPr>
-            <p:ph type="title"/>
-          </p:nvPr>
-        </p:nvSpPr>
-        <p:spPr>
-          <a:xfrm>
-            <a:off x="640079" y="1435895"/>
-            <a:ext cx="10890929" cy="1097280"/>
-          </a:xfrm>
-        </p:spPr>
-        <p:txBody>
-          <a:bodyPr>
-            <a:normAutofit/>
-          </a:bodyPr>
-          <a:lstStyle/>
-          <a:p>
-            <a:r>
-              <a:rPr lang="sk-SK" sz="5000" dirty="0">
-                <a:solidFill>
-                  <a:schemeClr val="bg1"/>
-                </a:solidFill>
-              </a:rPr>
-              <a:t>Výber a priblíženie témy</a:t>
-            </a:r>
-          </a:p>
-        </p:txBody>
-      </p:sp>
-      <p:sp>
-        <p:nvSpPr>
-          <p:cNvPr id="3" name="Zástupný objekt pre obsah 2">
-            <a:extLst>
-              <a:ext uri="{FF2B5EF4-FFF2-40B4-BE49-F238E27FC236}">
-                <a16:creationId xmlns:a16="http://schemas.microsoft.com/office/drawing/2014/main" id="{A495B2BE-F426-8948-D071-6F8CACF3EBAA}"/>
-              </a:ext>
-            </a:extLst>
-          </p:cNvPr>
-          <p:cNvSpPr>
-            <a:spLocks noGrp="1"/>
-          </p:cNvSpPr>
-          <p:nvPr>
-            <p:ph idx="1"/>
-          </p:nvPr>
-        </p:nvSpPr>
-        <p:spPr>
-          <a:xfrm>
-            <a:off x="640080" y="2840641"/>
-            <a:ext cx="10890928" cy="3566160"/>
-          </a:xfrm>
-        </p:spPr>
-        <p:txBody>
-          <a:bodyPr>
-            <a:normAutofit/>
-          </a:bodyPr>
-          <a:lstStyle/>
-          <a:p>
-            <a:r>
-              <a:rPr lang="sk-SK" sz="2500" b="1" dirty="0">
-                <a:solidFill>
-                  <a:schemeClr val="bg1"/>
-                </a:solidFill>
-              </a:rPr>
-              <a:t>Prvotná myšlienka – prepojiť AI a programovanie</a:t>
-            </a:r>
-          </a:p>
-          <a:p>
-            <a:r>
-              <a:rPr lang="sk-SK" sz="2500" b="1" dirty="0">
-                <a:solidFill>
-                  <a:schemeClr val="bg1"/>
-                </a:solidFill>
-              </a:rPr>
-              <a:t>Skúmať limity, silné a slabé stránky</a:t>
-            </a:r>
-          </a:p>
-          <a:p>
-            <a:r>
-              <a:rPr lang="sk-SK" sz="2500" b="1" dirty="0">
-                <a:solidFill>
-                  <a:schemeClr val="bg1"/>
-                </a:solidFill>
-              </a:rPr>
-              <a:t>Generovanie zdrojového kódu </a:t>
-            </a:r>
-          </a:p>
-          <a:p>
-            <a:pPr lvl="0"/>
-            <a:r>
-              <a:rPr lang="sk-SK" sz="2500" b="1" dirty="0">
-                <a:solidFill>
-                  <a:schemeClr val="bg1"/>
-                </a:solidFill>
-              </a:rPr>
-              <a:t>Agentický AI systém - plánuje kroky, rozkladá problém, validuje riešenia, pracuje so štruktúrovanými znalosťami</a:t>
-            </a:r>
-          </a:p>
-        </p:txBody>
-      </p:sp>
-    </p:spTree>
-    <p:extLst>
-      <p:ext uri="{BB962C8B-B14F-4D97-AF65-F5344CB8AC3E}">
-        <p14:creationId xmlns:p14="http://schemas.microsoft.com/office/powerpoint/2010/main" val="4196267488"/>
-      </p:ext>
-    </p:extLst>
-  </p:cSld>
-  <p:clrMapOvr>
-    <a:masterClrMapping/>
-  </p:clrMapOvr>
-  <p:transition spd="slow">
-    <p:push dir="u"/>
-  </p:transition>
-</p:sld>
-</file>
-
-<file path=ppt/slides/slide3.xml><?xml version="1.0" encoding="utf-8"?>
-<p:sld xmlns:a="http://schemas.openxmlformats.org/drawingml/2006/main" xmlns:r="http://schemas.openxmlformats.org/officeDocument/2006/relationships" xmlns:p="http://schemas.openxmlformats.org/presentationml/2006/main">
-  <p:cSld>
-    <p:bg>
-      <p:bgPr>
-        <a:blipFill dpi="0" rotWithShape="1">
-          <a:blip r:embed="rId2">
-            <a:lum/>
-          </a:blip>
-          <a:srcRect/>
-          <a:stretch>
-            <a:fillRect/>
-          </a:stretch>
-        </a:blipFill>
-        <a:effectLst/>
-      </p:bgPr>
-    </p:bg>
-    <p:spTree>
-      <p:nvGrpSpPr>
-        <p:cNvPr id="1" name=""/>
-        <p:cNvGrpSpPr/>
-        <p:nvPr/>
-      </p:nvGrpSpPr>
-      <p:grpSpPr>
-        <a:xfrm>
-          <a:off x="0" y="0"/>
-          <a:ext cx="0" cy="0"/>
-          <a:chOff x="0" y="0"/>
-          <a:chExt cx="0" cy="0"/>
-        </a:xfrm>
-      </p:grpSpPr>
-      <p:sp>
-        <p:nvSpPr>
-          <p:cNvPr id="2" name="Nadpis 1">
-            <a:extLst>
-              <a:ext uri="{FF2B5EF4-FFF2-40B4-BE49-F238E27FC236}">
-                <a16:creationId xmlns:a16="http://schemas.microsoft.com/office/drawing/2014/main" id="{44A7E0EE-A7DC-51CA-F7F0-1E599DD3625A}"/>
-              </a:ext>
-            </a:extLst>
-          </p:cNvPr>
-          <p:cNvSpPr>
-            <a:spLocks noGrp="1"/>
-          </p:cNvSpPr>
-          <p:nvPr>
-            <p:ph type="title"/>
-          </p:nvPr>
-        </p:nvSpPr>
-        <p:spPr>
-          <a:xfrm>
-            <a:off x="660993" y="1365166"/>
-            <a:ext cx="10890929" cy="1097280"/>
-          </a:xfrm>
-        </p:spPr>
-        <p:txBody>
-          <a:bodyPr>
-            <a:normAutofit/>
-          </a:bodyPr>
-          <a:lstStyle/>
-          <a:p>
-            <a:r>
-              <a:rPr lang="sk-SK" sz="5000" dirty="0">
-                <a:solidFill>
-                  <a:schemeClr val="bg1"/>
-                </a:solidFill>
-              </a:rPr>
-              <a:t>Kontext problému</a:t>
-            </a:r>
-          </a:p>
-        </p:txBody>
-      </p:sp>
-      <p:sp>
-        <p:nvSpPr>
-          <p:cNvPr id="3" name="Zástupný objekt pre obsah 2">
-            <a:extLst>
-              <a:ext uri="{FF2B5EF4-FFF2-40B4-BE49-F238E27FC236}">
-                <a16:creationId xmlns:a16="http://schemas.microsoft.com/office/drawing/2014/main" id="{60AB0F65-A22A-B1B7-35BD-5F3D7D937FAA}"/>
-              </a:ext>
-            </a:extLst>
-          </p:cNvPr>
-          <p:cNvSpPr>
-            <a:spLocks noGrp="1"/>
-          </p:cNvSpPr>
-          <p:nvPr>
-            <p:ph idx="1"/>
-          </p:nvPr>
-        </p:nvSpPr>
-        <p:spPr>
-          <a:xfrm>
-            <a:off x="660994" y="2662545"/>
-            <a:ext cx="10890928" cy="4554701"/>
-          </a:xfrm>
-        </p:spPr>
-        <p:txBody>
-          <a:bodyPr>
-            <a:normAutofit/>
-          </a:bodyPr>
-          <a:lstStyle/>
-          <a:p>
-            <a:r>
-              <a:rPr lang="sk-SK" sz="2500" b="1" dirty="0">
-                <a:solidFill>
-                  <a:schemeClr val="bg1"/>
-                </a:solidFill>
-              </a:rPr>
-              <a:t>Posun od manuálneho vývoja k AI-asistovanému programovaniu</a:t>
-            </a:r>
-          </a:p>
-          <a:p>
-            <a:r>
-              <a:rPr lang="sk-SK" sz="2500" b="1" dirty="0">
-                <a:solidFill>
-                  <a:schemeClr val="bg1"/>
-                </a:solidFill>
-              </a:rPr>
-              <a:t>LLM ako generátory kódu, dokumentácie a návrhov riešení</a:t>
-            </a:r>
-          </a:p>
-          <a:p>
-            <a:r>
-              <a:rPr lang="sk-SK" sz="2500" b="1" dirty="0">
-                <a:solidFill>
-                  <a:schemeClr val="bg1"/>
-                </a:solidFill>
-              </a:rPr>
-              <a:t>Zmena roly vývojára – od implementácie k riadeniu a validácii</a:t>
-            </a:r>
-          </a:p>
-          <a:p>
-            <a:r>
-              <a:rPr lang="sk-SK" sz="2500" b="1" dirty="0">
-                <a:solidFill>
-                  <a:schemeClr val="bg1"/>
-                </a:solidFill>
-              </a:rPr>
-              <a:t>Obmedzenia súčasných modelov pri komplexných systémoch</a:t>
-            </a:r>
-          </a:p>
-          <a:p>
-            <a:r>
-              <a:rPr lang="sk-SK" sz="2500" b="1" dirty="0">
-                <a:solidFill>
-                  <a:schemeClr val="bg1"/>
-                </a:solidFill>
-              </a:rPr>
-              <a:t>Smerovanie k agentickým a autonómnym AI systémom</a:t>
-            </a:r>
-          </a:p>
-          <a:p>
-            <a:endParaRPr lang="sk-SK" sz="2500" dirty="0">
-              <a:solidFill>
-                <a:schemeClr val="bg1"/>
-              </a:solidFill>
-            </a:endParaRPr>
-          </a:p>
-        </p:txBody>
-      </p:sp>
-    </p:spTree>
-    <p:extLst>
-      <p:ext uri="{BB962C8B-B14F-4D97-AF65-F5344CB8AC3E}">
-        <p14:creationId xmlns:p14="http://schemas.microsoft.com/office/powerpoint/2010/main" val="2619691549"/>
-      </p:ext>
-    </p:extLst>
-  </p:cSld>
-  <p:clrMapOvr>
-    <a:masterClrMapping/>
-  </p:clrMapOvr>
-  <p:transition spd="med">
-    <p:pull/>
-  </p:transition>
-</p:sld>
-</file>
-
-<file path=ppt/slides/slide4.xml><?xml version="1.0" encoding="utf-8"?>
-<p:sld xmlns:a="http://schemas.openxmlformats.org/drawingml/2006/main" xmlns:r="http://schemas.openxmlformats.org/officeDocument/2006/relationships" xmlns:p="http://schemas.openxmlformats.org/presentationml/2006/main">
-  <p:cSld>
-    <p:bg>
-      <p:bgPr>
-        <a:blipFill dpi="0" rotWithShape="1">
-          <a:blip r:embed="rId2">
-            <a:lum/>
-          </a:blip>
-          <a:srcRect/>
-          <a:stretch>
-            <a:fillRect/>
-          </a:stretch>
-        </a:blipFill>
-        <a:effectLst/>
-      </p:bgPr>
-    </p:bg>
-    <p:spTree>
-      <p:nvGrpSpPr>
-        <p:cNvPr id="1" name="">
-          <a:extLst>
-            <a:ext uri="{FF2B5EF4-FFF2-40B4-BE49-F238E27FC236}">
-              <a16:creationId xmlns:a16="http://schemas.microsoft.com/office/drawing/2014/main" id="{62AB1382-D122-6A43-519D-57B346504861}"/>
-            </a:ext>
-          </a:extLst>
-        </p:cNvPr>
-        <p:cNvGrpSpPr/>
-        <p:nvPr/>
-      </p:nvGrpSpPr>
-      <p:grpSpPr>
-        <a:xfrm>
-          <a:off x="0" y="0"/>
-          <a:ext cx="0" cy="0"/>
-          <a:chOff x="0" y="0"/>
-          <a:chExt cx="0" cy="0"/>
-        </a:xfrm>
-      </p:grpSpPr>
-      <p:sp>
-        <p:nvSpPr>
-          <p:cNvPr id="2" name="Nadpis 1">
-            <a:extLst>
-              <a:ext uri="{FF2B5EF4-FFF2-40B4-BE49-F238E27FC236}">
-                <a16:creationId xmlns:a16="http://schemas.microsoft.com/office/drawing/2014/main" id="{73A7E189-820B-DC13-C76D-3C970BA9C1DE}"/>
-              </a:ext>
-            </a:extLst>
-          </p:cNvPr>
-          <p:cNvSpPr>
-            <a:spLocks noGrp="1"/>
-          </p:cNvSpPr>
-          <p:nvPr>
-            <p:ph type="title"/>
-          </p:nvPr>
-        </p:nvSpPr>
-        <p:spPr>
-          <a:xfrm>
-            <a:off x="640079" y="1107990"/>
-            <a:ext cx="10890929" cy="1097280"/>
-          </a:xfrm>
-        </p:spPr>
-        <p:txBody>
-          <a:bodyPr>
-            <a:normAutofit/>
-          </a:bodyPr>
-          <a:lstStyle/>
-          <a:p>
-            <a:r>
-              <a:rPr lang="sk-SK" sz="5000" dirty="0">
-                <a:solidFill>
-                  <a:schemeClr val="bg1"/>
-                </a:solidFill>
-              </a:rPr>
-              <a:t>LLM pri generovaní kódu</a:t>
-            </a:r>
-          </a:p>
-        </p:txBody>
-      </p:sp>
-      <p:sp>
-        <p:nvSpPr>
-          <p:cNvPr id="3" name="Zástupný objekt pre obsah 2">
-            <a:extLst>
-              <a:ext uri="{FF2B5EF4-FFF2-40B4-BE49-F238E27FC236}">
-                <a16:creationId xmlns:a16="http://schemas.microsoft.com/office/drawing/2014/main" id="{018D513B-715C-2C90-9BBE-CC28CC12BD20}"/>
-              </a:ext>
-            </a:extLst>
-          </p:cNvPr>
-          <p:cNvSpPr>
-            <a:spLocks noGrp="1"/>
-          </p:cNvSpPr>
-          <p:nvPr>
-            <p:ph idx="1"/>
-          </p:nvPr>
-        </p:nvSpPr>
-        <p:spPr>
-          <a:xfrm>
-            <a:off x="640079" y="2076757"/>
-            <a:ext cx="10890928" cy="4781243"/>
-          </a:xfrm>
-        </p:spPr>
-        <p:txBody>
-          <a:bodyPr>
-            <a:normAutofit fontScale="62500" lnSpcReduction="20000"/>
-          </a:bodyPr>
-          <a:lstStyle/>
-          <a:p>
-            <a:pPr marL="0" indent="0">
-              <a:buNone/>
-            </a:pPr>
-            <a:r>
-              <a:rPr lang="sk-SK" sz="3600" b="1" dirty="0">
-                <a:solidFill>
-                  <a:schemeClr val="bg1"/>
-                </a:solidFill>
-              </a:rPr>
-              <a:t>Silné stránky:	</a:t>
-            </a:r>
-          </a:p>
-          <a:p>
-            <a:pPr lvl="1"/>
-            <a:r>
-              <a:rPr lang="sk-SK" sz="3600" b="1" dirty="0">
-                <a:solidFill>
-                  <a:schemeClr val="bg1"/>
-                </a:solidFill>
-              </a:rPr>
-              <a:t>generovanie krátkych funkcií</a:t>
-            </a:r>
-          </a:p>
-          <a:p>
-            <a:pPr lvl="1"/>
-            <a:r>
-              <a:rPr lang="sk-SK" sz="3600" b="1" dirty="0">
-                <a:solidFill>
-                  <a:schemeClr val="bg1"/>
-                </a:solidFill>
-              </a:rPr>
-              <a:t>dopĺňanie existujúceho kódu</a:t>
-            </a:r>
-          </a:p>
-          <a:p>
-            <a:pPr lvl="1"/>
-            <a:r>
-              <a:rPr lang="sk-SK" sz="3600" b="1" dirty="0">
-                <a:solidFill>
-                  <a:schemeClr val="bg1"/>
-                </a:solidFill>
-              </a:rPr>
-              <a:t>tvorba dokumentácie</a:t>
-            </a:r>
-          </a:p>
-          <a:p>
-            <a:pPr lvl="1"/>
-            <a:r>
-              <a:rPr lang="sk-SK" sz="3600" b="1" dirty="0">
-                <a:solidFill>
-                  <a:schemeClr val="bg1"/>
-                </a:solidFill>
-              </a:rPr>
-              <a:t>rýchle prototypovanie</a:t>
-            </a:r>
-          </a:p>
-          <a:p>
-            <a:pPr marL="0" indent="0">
-              <a:buNone/>
-            </a:pPr>
-            <a:r>
-              <a:rPr lang="sk-SK" sz="3600" b="1" dirty="0">
-                <a:solidFill>
-                  <a:schemeClr val="bg1"/>
-                </a:solidFill>
-              </a:rPr>
-              <a:t>Slabé stránky:</a:t>
-            </a:r>
-          </a:p>
-          <a:p>
-            <a:pPr lvl="1"/>
-            <a:r>
-              <a:rPr lang="sk-SK" sz="3600" b="1" dirty="0">
-                <a:solidFill>
-                  <a:schemeClr val="bg1"/>
-                </a:solidFill>
-              </a:rPr>
-              <a:t>logické chyby</a:t>
-            </a:r>
-          </a:p>
-          <a:p>
-            <a:pPr lvl="1"/>
-            <a:r>
-              <a:rPr lang="sk-SK" sz="3600" b="1" dirty="0">
-                <a:solidFill>
-                  <a:schemeClr val="bg1"/>
-                </a:solidFill>
-              </a:rPr>
-              <a:t>problém s globálnym kontextom</a:t>
-            </a:r>
-          </a:p>
-          <a:p>
-            <a:pPr lvl="1"/>
-            <a:r>
-              <a:rPr lang="sk-SK" sz="3600" b="1" dirty="0">
-                <a:solidFill>
-                  <a:schemeClr val="bg1"/>
-                </a:solidFill>
-              </a:rPr>
-              <a:t>navrhovanie architektúry</a:t>
-            </a:r>
-          </a:p>
-          <a:p>
-            <a:pPr lvl="1"/>
-            <a:r>
-              <a:rPr lang="sk-SK" sz="3600" b="1" dirty="0">
-                <a:solidFill>
-                  <a:schemeClr val="bg1"/>
-                </a:solidFill>
-              </a:rPr>
-              <a:t>konzistencia medzi funkciami pri komplexných úlohách</a:t>
-            </a:r>
-          </a:p>
-          <a:p>
-            <a:pPr lvl="1"/>
-            <a:r>
-              <a:rPr lang="sk-SK" sz="3600" b="1" dirty="0">
-                <a:solidFill>
-                  <a:schemeClr val="bg1"/>
-                </a:solidFill>
-              </a:rPr>
-              <a:t>halucinácie</a:t>
-            </a:r>
-          </a:p>
-          <a:p>
-            <a:pPr marL="0" indent="0">
-              <a:buNone/>
-            </a:pPr>
-            <a:endParaRPr lang="sk-SK" sz="2500" dirty="0">
-              <a:solidFill>
-                <a:schemeClr val="bg1"/>
-              </a:solidFill>
-            </a:endParaRPr>
-          </a:p>
-        </p:txBody>
-      </p:sp>
-    </p:spTree>
-    <p:extLst>
-      <p:ext uri="{BB962C8B-B14F-4D97-AF65-F5344CB8AC3E}">
-        <p14:creationId xmlns:p14="http://schemas.microsoft.com/office/powerpoint/2010/main" val="3701397997"/>
-      </p:ext>
-    </p:extLst>
-  </p:cSld>
-  <p:clrMapOvr>
-    <a:masterClrMapping/>
-  </p:clrMapOvr>
-  <p:transition spd="med">
-    <p:pull/>
-  </p:transition>
-</p:sld>
-</file>
-
-<file path=ppt/slides/slide5.xml><?xml version="1.0" encoding="utf-8"?>
-<p:sld xmlns:a="http://schemas.openxmlformats.org/drawingml/2006/main" xmlns:r="http://schemas.openxmlformats.org/officeDocument/2006/relationships" xmlns:p="http://schemas.openxmlformats.org/presentationml/2006/main">
-  <p:cSld>
-    <p:bg>
-      <p:bgPr>
-        <a:blipFill dpi="0" rotWithShape="1">
-          <a:blip r:embed="rId2">
-            <a:lum/>
-          </a:blip>
-          <a:srcRect/>
-          <a:stretch>
-            <a:fillRect/>
-          </a:stretch>
-        </a:blipFill>
-        <a:effectLst/>
-      </p:bgPr>
-    </p:bg>
-    <p:spTree>
-      <p:nvGrpSpPr>
-        <p:cNvPr id="1" name="">
-          <a:extLst>
-            <a:ext uri="{FF2B5EF4-FFF2-40B4-BE49-F238E27FC236}">
-              <a16:creationId xmlns:a16="http://schemas.microsoft.com/office/drawing/2014/main" id="{FD564ACF-8F14-2D70-574E-04B27FE13874}"/>
-            </a:ext>
-          </a:extLst>
-        </p:cNvPr>
-        <p:cNvGrpSpPr/>
-        <p:nvPr/>
-      </p:nvGrpSpPr>
-      <p:grpSpPr>
-        <a:xfrm>
-          <a:off x="0" y="0"/>
-          <a:ext cx="0" cy="0"/>
-          <a:chOff x="0" y="0"/>
-          <a:chExt cx="0" cy="0"/>
-        </a:xfrm>
-      </p:grpSpPr>
-      <p:sp>
-        <p:nvSpPr>
-          <p:cNvPr id="2" name="Nadpis 1">
-            <a:extLst>
-              <a:ext uri="{FF2B5EF4-FFF2-40B4-BE49-F238E27FC236}">
-                <a16:creationId xmlns:a16="http://schemas.microsoft.com/office/drawing/2014/main" id="{CCA9AEA4-02C5-C759-E3C4-AFC419CFD871}"/>
-              </a:ext>
-            </a:extLst>
-          </p:cNvPr>
-          <p:cNvSpPr>
-            <a:spLocks noGrp="1"/>
-          </p:cNvSpPr>
-          <p:nvPr>
-            <p:ph type="title"/>
-          </p:nvPr>
-        </p:nvSpPr>
-        <p:spPr>
-          <a:xfrm>
-            <a:off x="640078" y="1400883"/>
-            <a:ext cx="10890929" cy="1097280"/>
-          </a:xfrm>
-        </p:spPr>
-        <p:txBody>
-          <a:bodyPr>
-            <a:normAutofit/>
-          </a:bodyPr>
-          <a:lstStyle/>
-          <a:p>
-            <a:r>
-              <a:rPr lang="sk-SK" sz="5000" dirty="0">
-                <a:solidFill>
-                  <a:schemeClr val="bg1"/>
-                </a:solidFill>
-              </a:rPr>
-              <a:t>Prístupy k zlepšeniu generovania kódu</a:t>
-            </a:r>
-          </a:p>
-        </p:txBody>
-      </p:sp>
-      <p:sp>
-        <p:nvSpPr>
-          <p:cNvPr id="3" name="Zástupný objekt pre obsah 2">
-            <a:extLst>
-              <a:ext uri="{FF2B5EF4-FFF2-40B4-BE49-F238E27FC236}">
-                <a16:creationId xmlns:a16="http://schemas.microsoft.com/office/drawing/2014/main" id="{206B3F5D-51E8-FAE7-14E3-4198F0F7AD51}"/>
-              </a:ext>
-            </a:extLst>
-          </p:cNvPr>
-          <p:cNvSpPr>
-            <a:spLocks noGrp="1"/>
-          </p:cNvSpPr>
-          <p:nvPr>
-            <p:ph idx="1"/>
-          </p:nvPr>
-        </p:nvSpPr>
-        <p:spPr>
-          <a:xfrm>
-            <a:off x="640079" y="2776844"/>
-            <a:ext cx="10890928" cy="4554701"/>
-          </a:xfrm>
-        </p:spPr>
-        <p:txBody>
-          <a:bodyPr>
-            <a:normAutofit/>
-          </a:bodyPr>
-          <a:lstStyle/>
-          <a:p>
-            <a:r>
-              <a:rPr lang="sk-SK" sz="2500" b="1" dirty="0">
-                <a:solidFill>
-                  <a:schemeClr val="bg1"/>
-                </a:solidFill>
-              </a:rPr>
-              <a:t>Prompt engineering</a:t>
-            </a:r>
-          </a:p>
-          <a:p>
-            <a:r>
-              <a:rPr lang="sk-SK" sz="2500" b="1" dirty="0">
-                <a:solidFill>
-                  <a:schemeClr val="bg1"/>
-                </a:solidFill>
-              </a:rPr>
-              <a:t>In-context learning</a:t>
-            </a:r>
-          </a:p>
-          <a:p>
-            <a:r>
-              <a:rPr lang="sk-SK" sz="2500" b="1" dirty="0">
-                <a:solidFill>
-                  <a:schemeClr val="bg1"/>
-                </a:solidFill>
-              </a:rPr>
-              <a:t>Chain-of-Thought prístup</a:t>
-            </a:r>
-          </a:p>
-          <a:p>
-            <a:r>
-              <a:rPr lang="sk-SK" sz="2500" b="1" dirty="0">
-                <a:solidFill>
-                  <a:schemeClr val="bg1"/>
-                </a:solidFill>
-              </a:rPr>
-              <a:t>Fine-tuning a doménová adaptácia</a:t>
-            </a:r>
-          </a:p>
-          <a:p>
-            <a:r>
-              <a:rPr lang="sk-SK" sz="2500" b="1" dirty="0">
-                <a:solidFill>
-                  <a:schemeClr val="bg1"/>
-                </a:solidFill>
-              </a:rPr>
-              <a:t>Retrieval-Augmented Generation (RAG)</a:t>
-            </a:r>
-          </a:p>
-          <a:p>
-            <a:endParaRPr lang="sk-SK" sz="2500" dirty="0">
-              <a:solidFill>
-                <a:schemeClr val="bg1"/>
-              </a:solidFill>
-            </a:endParaRPr>
-          </a:p>
-          <a:p>
-            <a:endParaRPr lang="sk-SK" sz="2500" dirty="0">
-              <a:solidFill>
-                <a:schemeClr val="bg1"/>
-              </a:solidFill>
-            </a:endParaRPr>
-          </a:p>
-        </p:txBody>
-      </p:sp>
-    </p:spTree>
-    <p:extLst>
-      <p:ext uri="{BB962C8B-B14F-4D97-AF65-F5344CB8AC3E}">
-        <p14:creationId xmlns:p14="http://schemas.microsoft.com/office/powerpoint/2010/main" val="3888856438"/>
-      </p:ext>
-    </p:extLst>
-  </p:cSld>
-  <p:clrMapOvr>
-    <a:masterClrMapping/>
-  </p:clrMapOvr>
-  <p:transition spd="med">
-    <p:pull/>
-  </p:transition>
-</p:sld>
-</file>
-
-<file path=ppt/slides/slide6.xml><?xml version="1.0" encoding="utf-8"?>
-<p:sld xmlns:a="http://schemas.openxmlformats.org/drawingml/2006/main" xmlns:r="http://schemas.openxmlformats.org/officeDocument/2006/relationships" xmlns:p="http://schemas.openxmlformats.org/presentationml/2006/main">
-  <p:cSld>
-    <p:bg>
-      <p:bgPr>
-        <a:blipFill dpi="0" rotWithShape="1">
-          <a:blip r:embed="rId2">
-            <a:lum/>
-          </a:blip>
-          <a:srcRect/>
-          <a:stretch>
-            <a:fillRect/>
-          </a:stretch>
-        </a:blipFill>
-        <a:effectLst/>
-      </p:bgPr>
-    </p:bg>
-    <p:spTree>
-      <p:nvGrpSpPr>
-        <p:cNvPr id="1" name="">
-          <a:extLst>
-            <a:ext uri="{FF2B5EF4-FFF2-40B4-BE49-F238E27FC236}">
-              <a16:creationId xmlns:a16="http://schemas.microsoft.com/office/drawing/2014/main" id="{96AD5128-B43E-D578-BDC1-C9B179658E29}"/>
-            </a:ext>
-          </a:extLst>
-        </p:cNvPr>
-        <p:cNvGrpSpPr/>
-        <p:nvPr/>
-      </p:nvGrpSpPr>
-      <p:grpSpPr>
-        <a:xfrm>
-          <a:off x="0" y="0"/>
-          <a:ext cx="0" cy="0"/>
-          <a:chOff x="0" y="0"/>
-          <a:chExt cx="0" cy="0"/>
-        </a:xfrm>
-      </p:grpSpPr>
-      <p:sp>
-        <p:nvSpPr>
-          <p:cNvPr id="2" name="Nadpis 1">
-            <a:extLst>
-              <a:ext uri="{FF2B5EF4-FFF2-40B4-BE49-F238E27FC236}">
-                <a16:creationId xmlns:a16="http://schemas.microsoft.com/office/drawing/2014/main" id="{AB7A802D-F5FC-A5C7-A613-18412A39FC5E}"/>
-              </a:ext>
-            </a:extLst>
-          </p:cNvPr>
-          <p:cNvSpPr>
-            <a:spLocks noGrp="1"/>
-          </p:cNvSpPr>
-          <p:nvPr>
-            <p:ph type="title"/>
-          </p:nvPr>
-        </p:nvSpPr>
-        <p:spPr>
-          <a:xfrm>
-            <a:off x="640078" y="1322174"/>
-            <a:ext cx="10890929" cy="1097280"/>
-          </a:xfrm>
-        </p:spPr>
-        <p:txBody>
-          <a:bodyPr>
-            <a:normAutofit/>
-          </a:bodyPr>
-          <a:lstStyle/>
-          <a:p>
-            <a:r>
-              <a:rPr lang="sk-SK" sz="5000" dirty="0">
-                <a:solidFill>
-                  <a:schemeClr val="bg1"/>
-                </a:solidFill>
-              </a:rPr>
-              <a:t>Cieľ práce</a:t>
-            </a:r>
-          </a:p>
-        </p:txBody>
-      </p:sp>
-      <p:sp>
-        <p:nvSpPr>
-          <p:cNvPr id="3" name="Zástupný objekt pre obsah 2">
-            <a:extLst>
-              <a:ext uri="{FF2B5EF4-FFF2-40B4-BE49-F238E27FC236}">
-                <a16:creationId xmlns:a16="http://schemas.microsoft.com/office/drawing/2014/main" id="{1F6AB18E-A40A-4A5E-7D28-2D74ED4B70DA}"/>
-              </a:ext>
-            </a:extLst>
-          </p:cNvPr>
-          <p:cNvSpPr>
-            <a:spLocks noGrp="1"/>
-          </p:cNvSpPr>
-          <p:nvPr>
-            <p:ph idx="1"/>
-          </p:nvPr>
-        </p:nvSpPr>
-        <p:spPr>
-          <a:xfrm>
-            <a:off x="640079" y="2496887"/>
-            <a:ext cx="10890928" cy="4554701"/>
-          </a:xfrm>
-        </p:spPr>
-        <p:txBody>
-          <a:bodyPr>
-            <a:normAutofit/>
-          </a:bodyPr>
-          <a:lstStyle/>
-          <a:p>
-            <a:r>
-              <a:rPr lang="sk-SK" sz="2500" b="1" dirty="0">
-                <a:solidFill>
-                  <a:schemeClr val="bg1"/>
-                </a:solidFill>
-              </a:rPr>
-              <a:t>Transformácia zadania na prípad použitia</a:t>
-            </a:r>
-          </a:p>
-          <a:p>
-            <a:r>
-              <a:rPr lang="sk-SK" sz="2500" b="1" dirty="0">
-                <a:solidFill>
-                  <a:schemeClr val="bg1"/>
-                </a:solidFill>
-              </a:rPr>
-              <a:t>Rozklad na funkčné jednotky</a:t>
-            </a:r>
-          </a:p>
-          <a:p>
-            <a:r>
-              <a:rPr lang="sk-SK" sz="2500" b="1" dirty="0">
-                <a:solidFill>
-                  <a:schemeClr val="bg1"/>
-                </a:solidFill>
-              </a:rPr>
-              <a:t>Generovanie implementácií</a:t>
-            </a:r>
-          </a:p>
-          <a:p>
-            <a:r>
-              <a:rPr lang="sk-SK" sz="2500" b="1" dirty="0">
-                <a:solidFill>
-                  <a:schemeClr val="bg1"/>
-                </a:solidFill>
-              </a:rPr>
-              <a:t>Validácia funkcií a programu</a:t>
-            </a:r>
-          </a:p>
-          <a:p>
-            <a:r>
-              <a:rPr lang="sk-SK" sz="2500" b="1" dirty="0">
-                <a:solidFill>
-                  <a:schemeClr val="bg1"/>
-                </a:solidFill>
-              </a:rPr>
-              <a:t>Integrácia výsledného riešenia</a:t>
-            </a:r>
-          </a:p>
-          <a:p>
-            <a:r>
-              <a:rPr lang="sk-SK" sz="2500" b="1" dirty="0">
-                <a:solidFill>
-                  <a:schemeClr val="bg1"/>
-                </a:solidFill>
-              </a:rPr>
-              <a:t>Využitie GraphRAG znalostnej bázy a jej dopĺňanie </a:t>
-            </a:r>
-          </a:p>
-          <a:p>
-            <a:pPr marL="0" indent="0">
-              <a:buNone/>
-            </a:pPr>
-            <a:endParaRPr lang="sk-SK" sz="2500" dirty="0">
-              <a:solidFill>
-                <a:schemeClr val="bg1"/>
-              </a:solidFill>
-            </a:endParaRPr>
-          </a:p>
-        </p:txBody>
-      </p:sp>
-    </p:spTree>
-    <p:extLst>
-      <p:ext uri="{BB962C8B-B14F-4D97-AF65-F5344CB8AC3E}">
-        <p14:creationId xmlns:p14="http://schemas.microsoft.com/office/powerpoint/2010/main" val="996101097"/>
-      </p:ext>
-    </p:extLst>
-  </p:cSld>
-  <p:clrMapOvr>
-    <a:masterClrMapping/>
-  </p:clrMapOvr>
-  <p:transition spd="med">
-    <p:pull/>
-  </p:transition>
-</p:sld>
-</file>
-
-<file path=ppt/slides/slide7.xml><?xml version="1.0" encoding="utf-8"?>
-<p:sld xmlns:a="http://schemas.openxmlformats.org/drawingml/2006/main" xmlns:r="http://schemas.openxmlformats.org/officeDocument/2006/relationships" xmlns:p="http://schemas.openxmlformats.org/presentationml/2006/main">
-  <p:cSld>
-    <p:bg>
-      <p:bgPr>
-        <a:blipFill dpi="0" rotWithShape="1">
-          <a:blip r:embed="rId2">
-            <a:lum/>
-          </a:blip>
-          <a:srcRect/>
-          <a:stretch>
-            <a:fillRect/>
-          </a:stretch>
-        </a:blipFill>
-        <a:effectLst/>
-      </p:bgPr>
-    </p:bg>
-    <p:spTree>
-      <p:nvGrpSpPr>
-        <p:cNvPr id="1" name="">
-          <a:extLst>
-            <a:ext uri="{FF2B5EF4-FFF2-40B4-BE49-F238E27FC236}">
-              <a16:creationId xmlns:a16="http://schemas.microsoft.com/office/drawing/2014/main" id="{A94434C8-D42A-3425-8131-B2916BB38F0B}"/>
-            </a:ext>
-          </a:extLst>
-        </p:cNvPr>
-        <p:cNvGrpSpPr/>
-        <p:nvPr/>
-      </p:nvGrpSpPr>
-      <p:grpSpPr>
-        <a:xfrm>
-          <a:off x="0" y="0"/>
-          <a:ext cx="0" cy="0"/>
-          <a:chOff x="0" y="0"/>
-          <a:chExt cx="0" cy="0"/>
-        </a:xfrm>
-      </p:grpSpPr>
-      <p:sp useBgFill="1">
-        <p:nvSpPr>
-          <p:cNvPr id="19" name="Rectangle 14">
-            <a:extLst>
-              <a:ext uri="{FF2B5EF4-FFF2-40B4-BE49-F238E27FC236}">
-                <a16:creationId xmlns:a16="http://schemas.microsoft.com/office/drawing/2014/main" id="{DBDA151C-5770-45E4-AAFF-59E7F403866D}"/>
-              </a:ext>
-              <a:ext uri="{C183D7F6-B498-43B3-948B-1728B52AA6E4}">
-                <adec:decorative xmlns:adec="http://schemas.microsoft.com/office/drawing/2017/decorative" val="1"/>
-              </a:ext>
-            </a:extLst>
-          </p:cNvPr>
-          <p:cNvSpPr>
-            <a:spLocks noGrp="1" noRot="1" noChangeAspect="1" noMove="1" noResize="1" noEditPoints="1" noAdjustHandles="1" noChangeArrowheads="1" noChangeShapeType="1" noTextEdit="1"/>
-          </p:cNvSpPr>
-          <p:nvPr>
-            <p:extLst>
-              <p:ext uri="{386F3935-93C4-4BCD-93E2-E3B085C9AB24}">
-                <p16:designElem xmlns:p16="http://schemas.microsoft.com/office/powerpoint/2015/main" val="1"/>
-              </p:ext>
-            </p:extLst>
-          </p:nvPr>
-        </p:nvSpPr>
-        <p:spPr>
-          <a:xfrm>
-            <a:off x="0" y="0"/>
-            <a:ext cx="12192000" cy="6858000"/>
-          </a:xfrm>
-          <a:prstGeom prst="rect">
-            <a:avLst/>
-          </a:prstGeom>
-          <a:ln w="12700" cap="flat" cmpd="sng" algn="ctr">
-            <a:noFill/>
-            <a:prstDash val="solid"/>
-            <a:miter lim="800000"/>
-          </a:ln>
-          <a:effectLst/>
-          <a:extLst>
-            <a:ext uri="{91240B29-F687-4F45-9708-019B960494DF}">
-              <a14:hiddenLine xmlns:a14="http://schemas.microsoft.com/office/drawing/2010/main" w="12700" cap="flat" cmpd="sng" algn="ctr">
-                <a:solidFill>
-                  <a:schemeClr val="accent1">
-                    <a:shade val="50000"/>
-                  </a:schemeClr>
-                </a:solidFill>
-                <a:prstDash val="solid"/>
-                <a:miter lim="800000"/>
-              </a14:hiddenLine>
-            </a:ext>
-          </a:extLst>
-        </p:spPr>
-        <p:style>
-          <a:lnRef idx="2">
-            <a:schemeClr val="accent1">
-              <a:shade val="50000"/>
-            </a:schemeClr>
-          </a:lnRef>
-          <a:fillRef idx="1">
-            <a:schemeClr val="accent1"/>
-          </a:fillRef>
-          <a:effectRef idx="0">
-            <a:schemeClr val="accent1"/>
-          </a:effectRef>
-          <a:fontRef idx="minor">
-            <a:schemeClr val="lt1"/>
-          </a:fontRef>
-        </p:style>
-        <p:txBody>
-          <a:bodyPr rtlCol="0" anchor="ctr"/>
-          <a:lstStyle/>
-          <a:p>
-            <a:pPr algn="ctr"/>
-            <a:endParaRPr lang="en-US" dirty="0"/>
-          </a:p>
-        </p:txBody>
-      </p:sp>
-      <p:sp>
-        <p:nvSpPr>
-          <p:cNvPr id="2" name="Nadpis 1">
-            <a:extLst>
-              <a:ext uri="{FF2B5EF4-FFF2-40B4-BE49-F238E27FC236}">
-                <a16:creationId xmlns:a16="http://schemas.microsoft.com/office/drawing/2014/main" id="{7CA0A90F-6BD0-CEFA-90C0-AC8CB47AB4D8}"/>
-              </a:ext>
-            </a:extLst>
-          </p:cNvPr>
-          <p:cNvSpPr>
-            <a:spLocks noGrp="1"/>
-          </p:cNvSpPr>
-          <p:nvPr>
-            <p:ph type="title"/>
-          </p:nvPr>
-        </p:nvSpPr>
-        <p:spPr>
-          <a:xfrm>
-            <a:off x="640080" y="1153886"/>
-            <a:ext cx="10890928" cy="971550"/>
-          </a:xfrm>
-        </p:spPr>
-        <p:txBody>
-          <a:bodyPr anchor="t">
-            <a:normAutofit/>
-          </a:bodyPr>
-          <a:lstStyle/>
-          <a:p>
-            <a:r>
-              <a:rPr lang="sk-SK" sz="5000" dirty="0">
-                <a:solidFill>
-                  <a:schemeClr val="bg1"/>
-                </a:solidFill>
-              </a:rPr>
-              <a:t>Architektúra systému</a:t>
-            </a:r>
-          </a:p>
-        </p:txBody>
-      </p:sp>
-      <p:cxnSp>
-        <p:nvCxnSpPr>
-          <p:cNvPr id="20" name="Straight Connector 16">
-            <a:extLst>
-              <a:ext uri="{FF2B5EF4-FFF2-40B4-BE49-F238E27FC236}">
-                <a16:creationId xmlns:a16="http://schemas.microsoft.com/office/drawing/2014/main" id="{39AA7464-1EB7-A869-C7D3-AA680BBA984A}"/>
-              </a:ext>
-              <a:ext uri="{C183D7F6-B498-43B3-948B-1728B52AA6E4}">
-                <adec:decorative xmlns:adec="http://schemas.microsoft.com/office/drawing/2017/decorative" val="1"/>
-              </a:ext>
-            </a:extLst>
-          </p:cNvPr>
-          <p:cNvCxnSpPr>
-            <a:cxnSpLocks noGrp="1" noRot="1" noChangeAspect="1" noMove="1" noResize="1" noEditPoints="1" noAdjustHandles="1" noChangeArrowheads="1" noChangeShapeType="1"/>
-          </p:cNvCxnSpPr>
-          <p:nvPr>
-            <p:extLst>
-              <p:ext uri="{386F3935-93C4-4BCD-93E2-E3B085C9AB24}">
-                <p16:designElem xmlns:p16="http://schemas.microsoft.com/office/powerpoint/2015/main" val="1"/>
-              </p:ext>
-            </p:extLst>
-          </p:nvPr>
-        </p:nvCxnSpPr>
-        <p:spPr>
-          <a:xfrm>
-            <a:off x="713232" y="1031001"/>
-            <a:ext cx="978862" cy="0"/>
-          </a:xfrm>
-          <a:prstGeom prst="line">
-            <a:avLst/>
-          </a:prstGeom>
-          <a:ln w="76200"/>
-        </p:spPr>
-        <p:style>
-          <a:lnRef idx="1">
-            <a:schemeClr val="accent1"/>
-          </a:lnRef>
-          <a:fillRef idx="0">
-            <a:schemeClr val="accent1"/>
-          </a:fillRef>
-          <a:effectRef idx="0">
-            <a:schemeClr val="accent1"/>
-          </a:effectRef>
-          <a:fontRef idx="minor">
-            <a:schemeClr val="tx1"/>
-          </a:fontRef>
-        </p:style>
-      </p:cxnSp>
-      <p:pic>
-        <p:nvPicPr>
-          <p:cNvPr id="10" name="Obrázok 9" descr="Obrázok, na ktorom je text, snímka obrazovky, písmo&#10;&#10;Obsah vygenerovaný pomocou AI môže byť nesprávny.">
-            <a:extLst>
-              <a:ext uri="{FF2B5EF4-FFF2-40B4-BE49-F238E27FC236}">
-                <a16:creationId xmlns:a16="http://schemas.microsoft.com/office/drawing/2014/main" id="{C1BB7A12-4490-4824-5F7F-51CABE447569}"/>
-              </a:ext>
-            </a:extLst>
-          </p:cNvPr>
-          <p:cNvPicPr>
-            <a:picLocks noChangeAspect="1"/>
-          </p:cNvPicPr>
-          <p:nvPr/>
-        </p:nvPicPr>
-        <p:blipFill>
-          <a:blip r:embed="rId3">
-            <a:extLst>
-              <a:ext uri="{28A0092B-C50C-407E-A947-70E740481C1C}">
-                <a14:useLocalDpi xmlns:a14="http://schemas.microsoft.com/office/drawing/2010/main" val="0"/>
-              </a:ext>
-            </a:extLst>
-          </a:blip>
-          <a:stretch>
-            <a:fillRect/>
-          </a:stretch>
-        </p:blipFill>
-        <p:spPr>
-          <a:xfrm>
-            <a:off x="713232" y="2248320"/>
-            <a:ext cx="5986957" cy="3771782"/>
-          </a:xfrm>
-          <a:prstGeom prst="roundRect">
-            <a:avLst>
-              <a:gd name="adj" fmla="val 8594"/>
-            </a:avLst>
-          </a:prstGeom>
-          <a:solidFill>
-            <a:srgbClr val="FFFFFF">
-              <a:shade val="85000"/>
-            </a:srgbClr>
-          </a:solidFill>
-          <a:ln>
-            <a:noFill/>
-          </a:ln>
-          <a:effectLst>
-            <a:reflection blurRad="12700" stA="38000" endPos="28000" dist="5000" dir="5400000" sy="-100000" algn="bl" rotWithShape="0"/>
-          </a:effectLst>
-        </p:spPr>
-      </p:pic>
-      <p:sp>
-        <p:nvSpPr>
-          <p:cNvPr id="3" name="Zástupný objekt pre obsah 2">
-            <a:extLst>
-              <a:ext uri="{FF2B5EF4-FFF2-40B4-BE49-F238E27FC236}">
-                <a16:creationId xmlns:a16="http://schemas.microsoft.com/office/drawing/2014/main" id="{CB4D343D-1DE2-7215-A0FC-839B4AF68CB2}"/>
-              </a:ext>
-            </a:extLst>
-          </p:cNvPr>
-          <p:cNvSpPr>
-            <a:spLocks noGrp="1"/>
-          </p:cNvSpPr>
-          <p:nvPr>
-            <p:ph idx="1"/>
-          </p:nvPr>
-        </p:nvSpPr>
-        <p:spPr>
-          <a:xfrm>
-            <a:off x="6864003" y="2007065"/>
-            <a:ext cx="5164183" cy="4465172"/>
-          </a:xfrm>
-        </p:spPr>
-        <p:txBody>
-          <a:bodyPr anchor="t">
-            <a:normAutofit fontScale="92500" lnSpcReduction="10000"/>
-          </a:bodyPr>
-          <a:lstStyle/>
-          <a:p>
-            <a:r>
-              <a:rPr lang="sk-SK" sz="2700" b="1" dirty="0">
-                <a:solidFill>
-                  <a:schemeClr val="bg1"/>
-                </a:solidFill>
-              </a:rPr>
-              <a:t>Pipeline spolupracujúcich agentov</a:t>
-            </a:r>
-          </a:p>
-          <a:p>
-            <a:r>
-              <a:rPr lang="sk-SK" sz="2700" b="1" dirty="0">
-                <a:solidFill>
-                  <a:schemeClr val="bg1"/>
-                </a:solidFill>
-              </a:rPr>
-              <a:t>Iteratívne generovanie a opravy</a:t>
-            </a:r>
-          </a:p>
-          <a:p>
-            <a:r>
-              <a:rPr lang="sk-SK" sz="2700" b="1" dirty="0">
-                <a:solidFill>
-                  <a:schemeClr val="bg1"/>
-                </a:solidFill>
-              </a:rPr>
-              <a:t>Viacmodelový prístup (rôzne LLM pre rôzne úlohy)</a:t>
-            </a:r>
-          </a:p>
-          <a:p>
-            <a:pPr marL="0" indent="0">
-              <a:buNone/>
-            </a:pPr>
-            <a:r>
-              <a:rPr lang="sk-SK" sz="2700" b="1" dirty="0">
-                <a:solidFill>
-                  <a:schemeClr val="bg1"/>
-                </a:solidFill>
-              </a:rPr>
-              <a:t>Podporné komponenty:</a:t>
-            </a:r>
-          </a:p>
-          <a:p>
-            <a:pPr lvl="1"/>
-            <a:r>
-              <a:rPr lang="sk-SK" sz="2700" b="1" dirty="0">
-                <a:solidFill>
-                  <a:schemeClr val="bg1"/>
-                </a:solidFill>
-              </a:rPr>
-              <a:t>GitHub Explorer (extrakcia funkcií)</a:t>
-            </a:r>
-          </a:p>
-          <a:p>
-            <a:pPr lvl="1"/>
-            <a:r>
-              <a:rPr lang="sk-SK" sz="2700" b="1" dirty="0">
-                <a:solidFill>
-                  <a:schemeClr val="bg1"/>
-                </a:solidFill>
-              </a:rPr>
-              <a:t>Rozhodovanie o perzistencii</a:t>
-            </a:r>
-          </a:p>
-          <a:p>
-            <a:pPr lvl="1"/>
-            <a:r>
-              <a:rPr lang="sk-SK" sz="2700" b="1" dirty="0">
-                <a:solidFill>
-                  <a:schemeClr val="bg1"/>
-                </a:solidFill>
-              </a:rPr>
-              <a:t>GraphRAG</a:t>
-            </a:r>
-          </a:p>
-          <a:p>
-            <a:pPr marL="0" indent="0">
-              <a:buNone/>
-            </a:pPr>
-            <a:endParaRPr lang="sk-SK" dirty="0"/>
-          </a:p>
-        </p:txBody>
-      </p:sp>
-    </p:spTree>
-    <p:extLst>
-      <p:ext uri="{BB962C8B-B14F-4D97-AF65-F5344CB8AC3E}">
-        <p14:creationId xmlns:p14="http://schemas.microsoft.com/office/powerpoint/2010/main" val="264000584"/>
-      </p:ext>
-    </p:extLst>
-  </p:cSld>
-  <p:clrMapOvr>
-    <a:masterClrMapping/>
-  </p:clrMapOvr>
-  <p:transition spd="med">
-    <p:pull/>
-  </p:transition>
-</p:sld>
-</file>
-
-<file path=ppt/slides/slide8.xml><?xml version="1.0" encoding="utf-8"?>
-<p:sld xmlns:a="http://schemas.openxmlformats.org/drawingml/2006/main" xmlns:r="http://schemas.openxmlformats.org/officeDocument/2006/relationships" xmlns:p="http://schemas.openxmlformats.org/presentationml/2006/main">
-  <p:cSld>
-    <p:bg>
-      <p:bgPr>
-        <a:blipFill dpi="0" rotWithShape="1">
-          <a:blip r:embed="rId2">
-            <a:lum/>
-          </a:blip>
-          <a:srcRect/>
-          <a:stretch>
-            <a:fillRect/>
-          </a:stretch>
-        </a:blipFill>
-        <a:effectLst/>
-      </p:bgPr>
-    </p:bg>
-    <p:spTree>
-      <p:nvGrpSpPr>
-        <p:cNvPr id="1" name="">
-          <a:extLst>
-            <a:ext uri="{FF2B5EF4-FFF2-40B4-BE49-F238E27FC236}">
-              <a16:creationId xmlns:a16="http://schemas.microsoft.com/office/drawing/2014/main" id="{19D827A6-DA40-E7CC-55DB-D36739E086F0}"/>
-            </a:ext>
-          </a:extLst>
-        </p:cNvPr>
-        <p:cNvGrpSpPr/>
-        <p:nvPr/>
-      </p:nvGrpSpPr>
-      <p:grpSpPr>
-        <a:xfrm>
-          <a:off x="0" y="0"/>
-          <a:ext cx="0" cy="0"/>
-          <a:chOff x="0" y="0"/>
-          <a:chExt cx="0" cy="0"/>
-        </a:xfrm>
-      </p:grpSpPr>
-      <p:sp>
-        <p:nvSpPr>
-          <p:cNvPr id="2" name="Nadpis 1">
-            <a:extLst>
-              <a:ext uri="{FF2B5EF4-FFF2-40B4-BE49-F238E27FC236}">
-                <a16:creationId xmlns:a16="http://schemas.microsoft.com/office/drawing/2014/main" id="{95BF6DEA-4200-01A9-9ACA-49D3E78C16B9}"/>
-              </a:ext>
-            </a:extLst>
-          </p:cNvPr>
-          <p:cNvSpPr>
-            <a:spLocks noGrp="1"/>
-          </p:cNvSpPr>
-          <p:nvPr>
-            <p:ph type="title"/>
-          </p:nvPr>
-        </p:nvSpPr>
-        <p:spPr>
-          <a:xfrm>
-            <a:off x="640078" y="1429330"/>
-            <a:ext cx="10890929" cy="1097280"/>
-          </a:xfrm>
-        </p:spPr>
-        <p:txBody>
-          <a:bodyPr>
-            <a:normAutofit/>
-          </a:bodyPr>
-          <a:lstStyle/>
-          <a:p>
-            <a:r>
-              <a:rPr lang="sk-SK" sz="5000" dirty="0">
-                <a:solidFill>
-                  <a:schemeClr val="bg1"/>
-                </a:solidFill>
-              </a:rPr>
-              <a:t>Aktuálny stav</a:t>
-            </a:r>
-          </a:p>
-        </p:txBody>
-      </p:sp>
-      <p:sp>
-        <p:nvSpPr>
-          <p:cNvPr id="3" name="Zástupný objekt pre obsah 2">
-            <a:extLst>
-              <a:ext uri="{FF2B5EF4-FFF2-40B4-BE49-F238E27FC236}">
-                <a16:creationId xmlns:a16="http://schemas.microsoft.com/office/drawing/2014/main" id="{76FB301B-5277-1B6F-5CEE-3D318842F5B0}"/>
-              </a:ext>
-            </a:extLst>
-          </p:cNvPr>
-          <p:cNvSpPr>
-            <a:spLocks noGrp="1"/>
-          </p:cNvSpPr>
-          <p:nvPr>
-            <p:ph idx="1"/>
-          </p:nvPr>
-        </p:nvSpPr>
-        <p:spPr>
-          <a:xfrm>
-            <a:off x="640078" y="2818355"/>
-            <a:ext cx="10890928" cy="4554701"/>
-          </a:xfrm>
-        </p:spPr>
-        <p:txBody>
-          <a:bodyPr>
-            <a:normAutofit/>
-          </a:bodyPr>
-          <a:lstStyle/>
-          <a:p>
-            <a:r>
-              <a:rPr lang="sk-SK" sz="2500" b="1" dirty="0">
-                <a:solidFill>
-                  <a:schemeClr val="bg1"/>
-                </a:solidFill>
-              </a:rPr>
-              <a:t>Vypracovaná analytická kapitola</a:t>
-            </a:r>
-          </a:p>
-          <a:p>
-            <a:r>
-              <a:rPr lang="sk-SK" sz="2500" b="1" dirty="0">
-                <a:solidFill>
-                  <a:schemeClr val="bg1"/>
-                </a:solidFill>
-              </a:rPr>
-              <a:t>Implementovaná prvá verzia pipeline</a:t>
-            </a:r>
-          </a:p>
-          <a:p>
-            <a:r>
-              <a:rPr lang="sk-SK" sz="2500" b="1" dirty="0">
-                <a:solidFill>
-                  <a:schemeClr val="bg1"/>
-                </a:solidFill>
-              </a:rPr>
-              <a:t>Funkčné generovanie, validácia funkcií a integrácia funkcií</a:t>
-            </a:r>
-          </a:p>
-          <a:p>
-            <a:r>
-              <a:rPr lang="sk-SK" sz="2500" b="1" dirty="0">
-                <a:solidFill>
-                  <a:schemeClr val="bg1"/>
-                </a:solidFill>
-              </a:rPr>
-              <a:t>Integrácia Neo4j a GraphRAG</a:t>
-            </a:r>
-          </a:p>
-          <a:p>
-            <a:r>
-              <a:rPr lang="sk-SK" sz="2500" b="1" dirty="0">
-                <a:solidFill>
-                  <a:schemeClr val="bg1"/>
-                </a:solidFill>
-              </a:rPr>
-              <a:t>Dopĺňanie znalostnej bázy</a:t>
-            </a:r>
-          </a:p>
-        </p:txBody>
-      </p:sp>
-    </p:spTree>
-    <p:extLst>
-      <p:ext uri="{BB962C8B-B14F-4D97-AF65-F5344CB8AC3E}">
-        <p14:creationId xmlns:p14="http://schemas.microsoft.com/office/powerpoint/2010/main" val="3413734222"/>
-      </p:ext>
-    </p:extLst>
-  </p:cSld>
-  <p:clrMapOvr>
-    <a:masterClrMapping/>
-  </p:clrMapOvr>
-  <p:transition spd="med">
-    <p:pull/>
-  </p:transition>
-</p:sld>
-</file>
-
-<file path=ppt/slides/slide9.xml><?xml version="1.0" encoding="utf-8"?>
-<p:sld xmlns:a="http://schemas.openxmlformats.org/drawingml/2006/main" xmlns:r="http://schemas.openxmlformats.org/officeDocument/2006/relationships" xmlns:p="http://schemas.openxmlformats.org/presentationml/2006/main">
-  <p:cSld>
-    <p:bg>
-      <p:bgPr>
-        <a:blipFill dpi="0" rotWithShape="1">
-          <a:blip r:embed="rId2">
-            <a:lum/>
-          </a:blip>
-          <a:srcRect/>
-          <a:stretch>
-            <a:fillRect/>
-          </a:stretch>
-        </a:blipFill>
-        <a:effectLst/>
-      </p:bgPr>
-    </p:bg>
-    <p:spTree>
-      <p:nvGrpSpPr>
-        <p:cNvPr id="1" name="">
-          <a:extLst>
-            <a:ext uri="{FF2B5EF4-FFF2-40B4-BE49-F238E27FC236}">
-              <a16:creationId xmlns:a16="http://schemas.microsoft.com/office/drawing/2014/main" id="{46A998F1-5261-87B3-ABCF-4D7E56995CA3}"/>
-            </a:ext>
-          </a:extLst>
-        </p:cNvPr>
-        <p:cNvGrpSpPr/>
-        <p:nvPr/>
-      </p:nvGrpSpPr>
-      <p:grpSpPr>
-        <a:xfrm>
-          <a:off x="0" y="0"/>
-          <a:ext cx="0" cy="0"/>
-          <a:chOff x="0" y="0"/>
-          <a:chExt cx="0" cy="0"/>
-        </a:xfrm>
-      </p:grpSpPr>
-      <p:sp>
-        <p:nvSpPr>
-          <p:cNvPr id="2" name="Nadpis 1">
-            <a:extLst>
-              <a:ext uri="{FF2B5EF4-FFF2-40B4-BE49-F238E27FC236}">
-                <a16:creationId xmlns:a16="http://schemas.microsoft.com/office/drawing/2014/main" id="{CA3A9AE8-31E6-8EA0-4FD4-A571EE2B8ED4}"/>
-              </a:ext>
-            </a:extLst>
-          </p:cNvPr>
-          <p:cNvSpPr>
-            <a:spLocks noGrp="1"/>
-          </p:cNvSpPr>
-          <p:nvPr>
-            <p:ph type="title"/>
-          </p:nvPr>
-        </p:nvSpPr>
-        <p:spPr>
-          <a:xfrm>
-            <a:off x="640077" y="1443618"/>
-            <a:ext cx="10890929" cy="1097280"/>
-          </a:xfrm>
-        </p:spPr>
-        <p:txBody>
-          <a:bodyPr>
-            <a:normAutofit/>
-          </a:bodyPr>
-          <a:lstStyle/>
-          <a:p>
-            <a:r>
-              <a:rPr lang="sk-SK" sz="5000" dirty="0">
-                <a:solidFill>
-                  <a:schemeClr val="bg1"/>
-                </a:solidFill>
-              </a:rPr>
-              <a:t>Plánované doplnenie</a:t>
-            </a:r>
-          </a:p>
-        </p:txBody>
-      </p:sp>
-      <p:sp>
-        <p:nvSpPr>
-          <p:cNvPr id="3" name="Zástupný objekt pre obsah 2">
-            <a:extLst>
-              <a:ext uri="{FF2B5EF4-FFF2-40B4-BE49-F238E27FC236}">
-                <a16:creationId xmlns:a16="http://schemas.microsoft.com/office/drawing/2014/main" id="{388B146F-F109-C0C3-9768-A3A49FC12928}"/>
-              </a:ext>
-            </a:extLst>
-          </p:cNvPr>
-          <p:cNvSpPr>
-            <a:spLocks noGrp="1"/>
-          </p:cNvSpPr>
-          <p:nvPr>
-            <p:ph idx="1"/>
-          </p:nvPr>
-        </p:nvSpPr>
-        <p:spPr>
-          <a:xfrm>
-            <a:off x="640078" y="2825499"/>
-            <a:ext cx="10890928" cy="4554701"/>
-          </a:xfrm>
-        </p:spPr>
-        <p:txBody>
-          <a:bodyPr>
-            <a:normAutofit/>
-          </a:bodyPr>
-          <a:lstStyle/>
-          <a:p>
-            <a:r>
-              <a:rPr lang="sk-SK" sz="2500" b="1" dirty="0">
-                <a:solidFill>
-                  <a:schemeClr val="bg1"/>
-                </a:solidFill>
-              </a:rPr>
-              <a:t>Zdokonalenie súčasnej verzie</a:t>
-            </a:r>
-          </a:p>
-          <a:p>
-            <a:r>
-              <a:rPr lang="sk-SK" sz="2500" b="1" dirty="0">
-                <a:solidFill>
-                  <a:schemeClr val="bg1"/>
-                </a:solidFill>
-              </a:rPr>
-              <a:t>Návrh testovacích scenárov</a:t>
-            </a:r>
-          </a:p>
-          <a:p>
-            <a:r>
-              <a:rPr lang="sk-SK" sz="2500" b="1" dirty="0">
-                <a:solidFill>
-                  <a:schemeClr val="bg1"/>
-                </a:solidFill>
-              </a:rPr>
-              <a:t>Definovanie metrík kvality</a:t>
-            </a:r>
-          </a:p>
-          <a:p>
-            <a:r>
-              <a:rPr lang="sk-SK" sz="2500" b="1" dirty="0">
-                <a:solidFill>
-                  <a:schemeClr val="bg1"/>
-                </a:solidFill>
-              </a:rPr>
-              <a:t>Porovnanie s klasickým LLM prístupom</a:t>
-            </a:r>
-          </a:p>
-          <a:p>
-            <a:r>
-              <a:rPr lang="sk-SK" sz="2500" b="1" dirty="0">
-                <a:solidFill>
-                  <a:schemeClr val="bg1"/>
-                </a:solidFill>
-              </a:rPr>
-              <a:t>Vyhodnotenie úspešnosti</a:t>
-            </a:r>
-          </a:p>
-          <a:p>
-            <a:endParaRPr lang="sk-SK" sz="2500" dirty="0">
-              <a:solidFill>
-                <a:schemeClr val="bg1"/>
-              </a:solidFill>
-            </a:endParaRPr>
-          </a:p>
-        </p:txBody>
-      </p:sp>
-    </p:spTree>
-    <p:extLst>
-      <p:ext uri="{BB962C8B-B14F-4D97-AF65-F5344CB8AC3E}">
-        <p14:creationId xmlns:p14="http://schemas.microsoft.com/office/powerpoint/2010/main" val="167047848"/>
-      </p:ext>
-    </p:extLst>
-  </p:cSld>
-  <p:clrMapOvr>
-    <a:masterClrMapping/>
-  </p:clrMapOvr>
-  <p:transition spd="med">
-    <p:pull/>
-  </p:transition>
 </p:sld>
 </file>
 
@@ -6645,6 +6273,21 @@
 </file>
 
 <file path=customXml/item1.xml><?xml version="1.0" encoding="utf-8"?>
+<p:properties xmlns:p="http://schemas.microsoft.com/office/2006/metadata/properties" xmlns:xsi="http://www.w3.org/2001/XMLSchema-instance" xmlns:pc="http://schemas.microsoft.com/office/infopath/2007/PartnerControls">
+  <documentManagement/>
+</p:properties>
+</file>
+
+<file path=customXml/item2.xml><?xml version="1.0" encoding="utf-8"?>
+<?mso-contentType ?>
+<FormTemplates xmlns="http://schemas.microsoft.com/sharepoint/v3/contenttype/forms">
+  <Display>DocumentLibraryForm</Display>
+  <Edit>DocumentLibraryForm</Edit>
+  <New>DocumentLibraryForm</New>
+</FormTemplates>
+</file>
+
+<file path=customXml/item3.xml><?xml version="1.0" encoding="utf-8"?>
 <ct:contentTypeSchema xmlns:ct="http://schemas.microsoft.com/office/2006/metadata/contentType" xmlns:ma="http://schemas.microsoft.com/office/2006/metadata/properties/metaAttributes" ct:_="" ma:_="" ma:contentTypeName="Dokument" ma:contentTypeID="0x0101001B12F2B0132DBD4EB8B6F86465EC0236" ma:contentTypeVersion="6" ma:contentTypeDescription="Umožňuje vytvoriť nový dokument." ma:contentTypeScope="" ma:versionID="d5a5e0b49b178d61f9ecd41930540663">
   <xsd:schema xmlns:xsd="http://www.w3.org/2001/XMLSchema" xmlns:xs="http://www.w3.org/2001/XMLSchema" xmlns:p="http://schemas.microsoft.com/office/2006/metadata/properties" xmlns:ns3="800fcd6c-1b80-4ef0-bca0-4dfac907e310" targetNamespace="http://schemas.microsoft.com/office/2006/metadata/properties" ma:root="true" ma:fieldsID="cd5e29a00545eaf977b3600ef8c11f13" ns3:_="">
     <xsd:import namespace="800fcd6c-1b80-4ef0-bca0-4dfac907e310"/>
@@ -6800,22 +6443,31 @@
 </ct:contentTypeSchema>
 </file>
 
-<file path=customXml/item2.xml><?xml version="1.0" encoding="utf-8"?>
-<?mso-contentType ?>
-<FormTemplates xmlns="http://schemas.microsoft.com/sharepoint/v3/contenttype/forms">
-  <Display>DocumentLibraryForm</Display>
-  <Edit>DocumentLibraryForm</Edit>
-  <New>DocumentLibraryForm</New>
-</FormTemplates>
+<file path=customXml/itemProps1.xml><?xml version="1.0" encoding="utf-8"?>
+<ds:datastoreItem xmlns:ds="http://schemas.openxmlformats.org/officeDocument/2006/customXml" ds:itemID="{973D0BA0-5522-438B-8ECA-C13BF2058805}">
+  <ds:schemaRefs>
+    <ds:schemaRef ds:uri="800fcd6c-1b80-4ef0-bca0-4dfac907e310"/>
+    <ds:schemaRef ds:uri="http://www.w3.org/XML/1998/namespace"/>
+    <ds:schemaRef ds:uri="http://schemas.microsoft.com/office/2006/documentManagement/types"/>
+    <ds:schemaRef ds:uri="http://schemas.openxmlformats.org/package/2006/metadata/core-properties"/>
+    <ds:schemaRef ds:uri="http://schemas.microsoft.com/office/2006/metadata/properties"/>
+    <ds:schemaRef ds:uri="http://purl.org/dc/dcmitype/"/>
+    <ds:schemaRef ds:uri="http://purl.org/dc/elements/1.1/"/>
+    <ds:schemaRef ds:uri="http://purl.org/dc/terms/"/>
+    <ds:schemaRef ds:uri="http://schemas.microsoft.com/office/infopath/2007/PartnerControls"/>
+  </ds:schemaRefs>
+</ds:datastoreItem>
 </file>
 
-<file path=customXml/item3.xml><?xml version="1.0" encoding="utf-8"?>
-<p:properties xmlns:p="http://schemas.microsoft.com/office/2006/metadata/properties" xmlns:xsi="http://www.w3.org/2001/XMLSchema-instance" xmlns:pc="http://schemas.microsoft.com/office/infopath/2007/PartnerControls">
-  <documentManagement/>
-</p:properties>
+<file path=customXml/itemProps2.xml><?xml version="1.0" encoding="utf-8"?>
+<ds:datastoreItem xmlns:ds="http://schemas.openxmlformats.org/officeDocument/2006/customXml" ds:itemID="{8DB316FC-9B84-4E00-AC3C-F9BC3EC7A868}">
+  <ds:schemaRefs>
+    <ds:schemaRef ds:uri="http://schemas.microsoft.com/sharepoint/v3/contenttype/forms"/>
+  </ds:schemaRefs>
+</ds:datastoreItem>
 </file>
 
-<file path=customXml/itemProps1.xml><?xml version="1.0" encoding="utf-8"?>
+<file path=customXml/itemProps3.xml><?xml version="1.0" encoding="utf-8"?>
 <ds:datastoreItem xmlns:ds="http://schemas.openxmlformats.org/officeDocument/2006/customXml" ds:itemID="{DCEDBA1B-6753-4522-B79F-AE422852F60A}">
   <ds:schemaRefs>
     <ds:schemaRef ds:uri="http://schemas.microsoft.com/office/2006/metadata/contentType"/>
@@ -6831,28 +6483,4 @@
     <ds:schemaRef ds:uri="http://schemas.microsoft.com/internal/obd"/>
   </ds:schemaRefs>
 </ds:datastoreItem>
-</file>
-
-<file path=customXml/itemProps2.xml><?xml version="1.0" encoding="utf-8"?>
-<ds:datastoreItem xmlns:ds="http://schemas.openxmlformats.org/officeDocument/2006/customXml" ds:itemID="{8DB316FC-9B84-4E00-AC3C-F9BC3EC7A868}">
-  <ds:schemaRefs>
-    <ds:schemaRef ds:uri="http://schemas.microsoft.com/sharepoint/v3/contenttype/forms"/>
-  </ds:schemaRefs>
-</ds:datastoreItem>
-</file>
-
-<file path=customXml/itemProps3.xml><?xml version="1.0" encoding="utf-8"?>
-<ds:datastoreItem xmlns:ds="http://schemas.openxmlformats.org/officeDocument/2006/customXml" ds:itemID="{973D0BA0-5522-438B-8ECA-C13BF2058805}">
-  <ds:schemaRefs>
-    <ds:schemaRef ds:uri="800fcd6c-1b80-4ef0-bca0-4dfac907e310"/>
-    <ds:schemaRef ds:uri="http://www.w3.org/XML/1998/namespace"/>
-    <ds:schemaRef ds:uri="http://schemas.microsoft.com/office/2006/documentManagement/types"/>
-    <ds:schemaRef ds:uri="http://schemas.openxmlformats.org/package/2006/metadata/core-properties"/>
-    <ds:schemaRef ds:uri="http://schemas.microsoft.com/office/2006/metadata/properties"/>
-    <ds:schemaRef ds:uri="http://purl.org/dc/dcmitype/"/>
-    <ds:schemaRef ds:uri="http://purl.org/dc/elements/1.1/"/>
-    <ds:schemaRef ds:uri="http://purl.org/dc/terms/"/>
-    <ds:schemaRef ds:uri="http://schemas.microsoft.com/office/infopath/2007/PartnerControls"/>
-  </ds:schemaRefs>
-</ds:datastoreItem>
 </file>
--- a/files/prezentacia_1.pptx
+++ b/files/prezentacia_1.pptx
@@ -5294,8 +5294,21 @@
                   <a:schemeClr val="bg1"/>
                 </a:solidFill>
               </a:rPr>
-              <a:t>Integrácia Neo4j a GraphRAG</a:t>
-            </a:r>
+              <a:t>Integrácia </a:t>
+            </a:r>
+            <a:r>
+              <a:rPr lang="sk-SK" sz="2500" b="1" dirty="0" err="1">
+                <a:solidFill>
+                  <a:schemeClr val="bg1"/>
+                </a:solidFill>
+              </a:rPr>
+              <a:t>GraphRAG</a:t>
+            </a:r>
+            <a:endParaRPr lang="sk-SK" sz="2500" b="1" dirty="0">
+              <a:solidFill>
+                <a:schemeClr val="bg1"/>
+              </a:solidFill>
+            </a:endParaRPr>
           </a:p>
           <a:p>
             <a:r>
